--- a/slides/00_Course_Map_EN.pptx
+++ b/slides/00_Course_Map_EN.pptx
@@ -6,7 +6,7 @@
   </p:sldMasterIdLst>
   <p:sldIdLst>
     <p:sldId id="256" r:id="rId7"/>
-    <p:sldId id="257" r:id="rId8"/>
+    <p:sldId id="257" r:id="rId9"/>
     <p:sldId id="258" r:id="rId10"/>
     <p:sldId id="259" r:id="rId11"/>
     <p:sldId id="260" r:id="rId12"/>
@@ -28,8 +28,6 @@
     <p:sldId id="276" r:id="rId28"/>
     <p:sldId id="277" r:id="rId29"/>
     <p:sldId id="278" r:id="rId30"/>
-    <p:sldId id="279" r:id="rId31"/>
-    <p:sldId id="280" r:id="rId32"/>
   </p:sldIdLst>
   <p:sldSz cx="12191695" cy="6858000" type="screen4x3"/>
   <p:notesSz cx="6858000" cy="9144000"/>
@@ -526,7 +524,31 @@
           <a:lstStyle/>
           <a:p>
             <a:r>
-              <a:t>[CORE] 5 min</a:t>
+              <a:t>Welcome. In this module we will work through S4T Modular Training — Course Map.</a:t>
+            </a:r>
+          </a:p>
+          <a:p/>
+          <a:p>
+            <a:r>
+              <a:t>Lab VM {{VM_IP}}</a:t>
+            </a:r>
+          </a:p>
+          <a:p/>
+          <a:p>
+            <a:r>
+              <a:t>The session alternates theory from the book with live exercises on the Stack4Things lab VM. Replace the placeholder IP with the address of the machine you are using.</a:t>
+            </a:r>
+          </a:p>
+          <a:p/>
+          <a:p>
+            <a:r>
+              <a:t>Assembling Smart CPS · Part II hands-on.</a:t>
+            </a:r>
+          </a:p>
+          <a:p/>
+          <a:p>
+            <a:r>
+              <a:t>When you're ready, advance to the first section.</a:t>
             </a:r>
           </a:p>
         </p:txBody>
@@ -596,7 +618,31 @@
           <a:lstStyle/>
           <a:p>
             <a:r>
-              <a:t>[CORE] 5 min</a:t>
+              <a:t>In this slide we cover Core modules — Ch.4, Ch.13–15. This material is covered in Book Part II · intro.tex · Ch.4 I/Ocloud.</a:t>
+            </a:r>
+          </a:p>
+          <a:p/>
+          <a:p>
+            <a:r>
+              <a:t>First, Ch.4 I/Ocloud foundations, then context for Module A (Virtual Nodes, IoTronic). Next, Ch.13 Docker deploy + board onboarding, then Module A: Active board deliverable.</a:t>
+            </a:r>
+          </a:p>
+          <a:p/>
+          <a:p>
+            <a:r>
+              <a:t>By contrast, Ch.14 Plugins, fleet, web services, then Module B sync HelloName + fleet preview. We should also consider that Ch.15 Environmental publisher + TOO(L)SMART, then Module C async, then InfluxDB.</a:t>
+            </a:r>
+          </a:p>
+          <a:p/>
+          <a:p>
+            <a:r>
+              <a:t>Another key point is that Part I chapters (Ch.1–12) provide theory referenced throughout core decks. Furthermore, Students should read Ch.13 abstract before Module A lab session.</a:t>
+            </a:r>
+          </a:p>
+          <a:p/>
+          <a:p>
+            <a:r>
+              <a:t>I'll pause here for questions, then we'll continue.</a:t>
             </a:r>
           </a:p>
         </p:txBody>
@@ -666,7 +712,31 @@
           <a:lstStyle/>
           <a:p>
             <a:r>
-              <a:t>[CORE] 5 min</a:t>
+              <a:t>In this slide we cover Extension modules — Ch.5, Ch.6, Ch.14. This material is covered in Ch.5 · Ch.6 · Ch.14 §14.2–14.3.</a:t>
+            </a:r>
+          </a:p>
+          <a:p/>
+          <a:p>
+            <a:r>
+              <a:t>First, regarding ch.5 virtual networking attach-port → module e, IoTronic ports API workflow. Next, regarding ch.6 web of things layered model → module f, gateway WoT before WSTUN demo.</a:t>
+            </a:r>
+          </a:p>
+          <a:p/>
+          <a:p>
+            <a:r>
+              <a:t>By contrast, Ch.14 Fleet operations + Web Services Manager, then Module D fleet inject + Module F. We should also consider that Extension tier adds per module; D is prerequisite for G (FL clients).</a:t>
+            </a:r>
+          </a:p>
+          <a:p/>
+          <a:p>
+            <a:r>
+              <a:t>Another key point is that regarding module f contrasts book weather server, 8080 with lab nginx :50000 tunnel demo. Furthermore, All extension decks use {{VM_IP}} for Horizon, API, and curl examples.</a:t>
+            </a:r>
+          </a:p>
+          <a:p/>
+          <a:p>
+            <a:r>
+              <a:t>I'll pause here for questions, then we'll continue.</a:t>
             </a:r>
           </a:p>
         </p:txBody>
@@ -736,7 +806,31 @@
           <a:lstStyle/>
           <a:p>
             <a:r>
-              <a:t>[CORE] 5 min</a:t>
+              <a:t>In this slide we cover Advanced modules — Ch.7, Ch.11, Ch.19. This material is covered in Ch.7 · Ch.11 · Ch.19.</a:t>
+            </a:r>
+          </a:p>
+          <a:p/>
+          <a:p>
+            <a:r>
+              <a:t>First, Ch.19 Federated Learning on edge boards, then Module G: Flower + 3 LR clients. Next, Ch.11 SLICES Blueprint + Crossplane + K3s, then Module H: declarative IoT GitOps.</a:t>
+            </a:r>
+          </a:p>
+          <a:p/>
+          <a:p>
+            <a:r>
+              <a:t>By contrast, regarding ch.7 faas / deviceless paradigm → module i, sync vs async plugin contrast. We should also consider that regarding advanced tier, theory-heavy; Module H benefits from a pre-provisioned K3s cluster.</a:t>
+            </a:r>
+          </a:p>
+          <a:p/>
+          <a:p>
+            <a:r>
+              <a:t>Another key point is that Module G needs Module D complete (3 Active boards on :1474/:1475/:1476). Furthermore, Module H K3s install should run overnight — do NOT concurrent with Module G.</a:t>
+            </a:r>
+          </a:p>
+          <a:p/>
+          <a:p>
+            <a:r>
+              <a:t>I'll pause here for questions, then we'll continue.</a:t>
             </a:r>
           </a:p>
         </p:txBody>
@@ -806,7 +900,31 @@
           <a:lstStyle/>
           <a:p>
             <a:r>
-              <a:t>[CORE] 5 min</a:t>
+              <a:t>On this slide, Module A — Deploy I/Ocloud.</a:t>
+            </a:r>
+          </a:p>
+          <a:p/>
+          <a:p>
+            <a:r>
+              <a:t>First, Ch.13 + Ch.4 · Docker Compose + board onboarding, then Active board in Horizon. Next, regarding deck, moduleA_Deploy_IOcloud_EN.pptx.</a:t>
+            </a:r>
+          </a:p>
+          <a:p/>
+          <a:p>
+            <a:r>
+              <a:t>By contrast, regarding validate, ./training/validate-lab.sh (18 core checks).</a:t>
+            </a:r>
+          </a:p>
+          <a:p/>
+          <a:p>
+            <a:r>
+              <a:t>If these objectives are clear, we can proceed.</a:t>
+            </a:r>
+          </a:p>
+          <a:p/>
+          <a:p>
+            <a:r>
+              <a:t>Instructor timing (title): Module A — Deploy I/Ocloud (CORE, 60 min)</a:t>
             </a:r>
           </a:p>
         </p:txBody>
@@ -876,7 +994,31 @@
           <a:lstStyle/>
           <a:p>
             <a:r>
-              <a:t>[CORE] 5 min</a:t>
+              <a:t>On this slide, Module B — Plugins &amp; Services.</a:t>
+            </a:r>
+          </a:p>
+          <a:p/>
+          <a:p>
+            <a:r>
+              <a:t>First, Ch.14 · HelloName sync Plugin Call + optional Docker lifecycle + fleet preview. Next, regarding deck, moduleB_Plugin_Services_EN.pptx.</a:t>
+            </a:r>
+          </a:p>
+          <a:p/>
+          <a:p>
+            <a:r>
+              <a:t>By contrast, Builds on Module A — board must be Active before inject.</a:t>
+            </a:r>
+          </a:p>
+          <a:p/>
+          <a:p>
+            <a:r>
+              <a:t>If these objectives are clear, we can proceed.</a:t>
+            </a:r>
+          </a:p>
+          <a:p/>
+          <a:p>
+            <a:r>
+              <a:t>Instructor timing (title): Module B — Plugins &amp; Services (CORE, 60 min)</a:t>
             </a:r>
           </a:p>
         </p:txBody>
@@ -946,7 +1088,31 @@
           <a:lstStyle/>
           <a:p>
             <a:r>
-              <a:t>[CORE] 5 min</a:t>
+              <a:t>On this slide, Module C — Environmental IoT Computation.</a:t>
+            </a:r>
+          </a:p>
+          <a:p/>
+          <a:p>
+            <a:r>
+              <a:t>First, Ch.15 · Async environmental_data publisher, then InfluxDB · TOO(L)SMART wrap-up. Next, regarding deck, moduleC_IoT_Computation_EN.pptx.</a:t>
+            </a:r>
+          </a:p>
+          <a:p/>
+          <a:p>
+            <a:r>
+              <a:t>By contrast, Contrasts with Module B sync plugin — continuous PaaS-style service.</a:t>
+            </a:r>
+          </a:p>
+          <a:p/>
+          <a:p>
+            <a:r>
+              <a:t>If these objectives are clear, we can proceed.</a:t>
+            </a:r>
+          </a:p>
+          <a:p/>
+          <a:p>
+            <a:r>
+              <a:t>Instructor timing (title): Module C — Environmental IoT Computation (CORE, 60 min)</a:t>
             </a:r>
           </a:p>
         </p:txBody>
@@ -1016,7 +1182,31 @@
           <a:lstStyle/>
           <a:p>
             <a:r>
-              <a:t>[CORE] 5 min</a:t>
+              <a:t>On this slide, Module D — Multi-board &amp; Fleet.</a:t>
+            </a:r>
+          </a:p>
+          <a:p/>
+          <a:p>
+            <a:r>
+              <a:t>First, regarding ch.13–14 · 3 lr instances, 1474/1475/1476 · fleet inject HelloName. Next, regarding deck, moduleD_MultiBoard_EN.pptx.</a:t>
+            </a:r>
+          </a:p>
+          <a:p/>
+          <a:p>
+            <a:r>
+              <a:t>By contrast, Prerequisite for Module G (Federated Learning needs 3 clients).</a:t>
+            </a:r>
+          </a:p>
+          <a:p/>
+          <a:p>
+            <a:r>
+              <a:t>If these objectives are clear, we can proceed.</a:t>
+            </a:r>
+          </a:p>
+          <a:p/>
+          <a:p>
+            <a:r>
+              <a:t>Instructor timing (title): Module D — Multi-board &amp; Fleet (EXT, +45–60 min)</a:t>
             </a:r>
           </a:p>
         </p:txBody>
@@ -1086,7 +1276,31 @@
           <a:lstStyle/>
           <a:p>
             <a:r>
-              <a:t>[CORE] 5 min</a:t>
+              <a:t>On this slide, Module E — Virtual Networking.</a:t>
+            </a:r>
+          </a:p>
+          <a:p/>
+          <a:p>
+            <a:r>
+              <a:t>First, Ch.5 attach-port · IoTronic ports API · WAgent orchestration. Next, regarding deck, moduleE_VirtualNetworking_EN.pptx.</a:t>
+            </a:r>
+          </a:p>
+          <a:p/>
+          <a:p>
+            <a:r>
+              <a:t>By contrast, Skip if short on time or Neutron L3 incomplete in Docker lab.</a:t>
+            </a:r>
+          </a:p>
+          <a:p/>
+          <a:p>
+            <a:r>
+              <a:t>If these objectives are clear, we can proceed.</a:t>
+            </a:r>
+          </a:p>
+          <a:p/>
+          <a:p>
+            <a:r>
+              <a:t>Instructor timing (title): Module E — Virtual Networking (EXT, +45–60 min, OPTIONAL)</a:t>
             </a:r>
           </a:p>
         </p:txBody>
@@ -1156,7 +1370,31 @@
           <a:lstStyle/>
           <a:p>
             <a:r>
-              <a:t>[CORE] 5 min</a:t>
+              <a:t>On this slide, Module F — Web Services, WSTUN &amp; WoT.</a:t>
+            </a:r>
+          </a:p>
+          <a:p/>
+          <a:p>
+            <a:r>
+              <a:t>First, Ch.6 + Ch.14 · WSTUN tunnel · Designate optional · book weather vs lab nginx. Next, regarding deck, moduleF_WebServices_WoT_EN.pptx.</a:t>
+            </a:r>
+          </a:p>
+          <a:p/>
+          <a:p>
+            <a:r>
+              <a:t>By contrast, regarding validate, ./training/validate-lab-wstun.sh.</a:t>
+            </a:r>
+          </a:p>
+          <a:p/>
+          <a:p>
+            <a:r>
+              <a:t>If these objectives are clear, we can proceed.</a:t>
+            </a:r>
+          </a:p>
+          <a:p/>
+          <a:p>
+            <a:r>
+              <a:t>Instructor timing (title): Module F — Web Services, WSTUN &amp; WoT (EXT, +30–45 min)</a:t>
             </a:r>
           </a:p>
         </p:txBody>
@@ -1226,7 +1464,31 @@
           <a:lstStyle/>
           <a:p>
             <a:r>
-              <a:t>[CORE] 5 min</a:t>
+              <a:t>On this slide, Module G — Federated Learning.</a:t>
+            </a:r>
+          </a:p>
+          <a:p/>
+          <a:p>
+            <a:r>
+              <a:t>First, Ch.19 · Flower server · 3 edge clients · requires Module D complete. Next, regarding deck, moduleG_FederatedLearning_EN.pptx.</a:t>
+            </a:r>
+          </a:p>
+          <a:p/>
+          <a:p>
+            <a:r>
+              <a:t>By contrast, Do NOT run simultaneously with Module H (K3s RAM gate).</a:t>
+            </a:r>
+          </a:p>
+          <a:p/>
+          <a:p>
+            <a:r>
+              <a:t>If these objectives are clear, we can proceed.</a:t>
+            </a:r>
+          </a:p>
+          <a:p/>
+          <a:p>
+            <a:r>
+              <a:t>Instructor timing (title): Module G — Federated Learning (ADV, +60–90 min)</a:t>
             </a:r>
           </a:p>
         </p:txBody>
@@ -1296,7 +1558,7 @@
           <a:lstStyle/>
           <a:p>
             <a:r>
-              <a:t>[CORE] 5 min</a:t>
+              <a:t>We now begin a new section: Training philosophy. Theory from the book · demo on the lab VM. In the next slides, listen for whether we are in theory mode or hands-on mode, and open your terminal when the slides turn to lab work.</a:t>
             </a:r>
           </a:p>
         </p:txBody>
@@ -1366,7 +1628,31 @@
           <a:lstStyle/>
           <a:p>
             <a:r>
-              <a:t>[CORE] 5 min</a:t>
+              <a:t>On this slide, Module H — SLICES Blueprint &amp; K3s.</a:t>
+            </a:r>
+          </a:p>
+          <a:p/>
+          <a:p>
+            <a:r>
+              <a:t>First, Ch.11 · Crossplane provider + K3s deploy · GitOps for IoT fleets. Next, regarding deck, moduleH_Blueprint_K3s_EN.pptx.</a:t>
+            </a:r>
+          </a:p>
+          <a:p/>
+          <a:p>
+            <a:r>
+              <a:t>By contrast, K3s cluster should be installed before the session on a dedicated VM.</a:t>
+            </a:r>
+          </a:p>
+          <a:p/>
+          <a:p>
+            <a:r>
+              <a:t>If these objectives are clear, we can proceed.</a:t>
+            </a:r>
+          </a:p>
+          <a:p/>
+          <a:p>
+            <a:r>
+              <a:t>Instructor timing (title): Module H — SLICES Blueprint &amp; K3s (ADV, +45–60 min)</a:t>
             </a:r>
           </a:p>
         </p:txBody>
@@ -1436,7 +1722,31 @@
           <a:lstStyle/>
           <a:p>
             <a:r>
-              <a:t>[CORE] 5 min</a:t>
+              <a:t>On this slide, Module I — FaaS &amp; Deviceless.</a:t>
+            </a:r>
+          </a:p>
+          <a:p/>
+          <a:p>
+            <a:r>
+              <a:t>First, Ch.7 theory · sync HelloName vs async environmental on same LR. Next, regarding deck, moduleI_FaaS_Deviceless_EN.pptx.</a:t>
+            </a:r>
+          </a:p>
+          <a:p/>
+          <a:p>
+            <a:r>
+              <a:t>By contrast, No new infrastructure — conceptual bridge across Modules B, C, F.</a:t>
+            </a:r>
+          </a:p>
+          <a:p/>
+          <a:p>
+            <a:r>
+              <a:t>If these objectives are clear, we can proceed.</a:t>
+            </a:r>
+          </a:p>
+          <a:p/>
+          <a:p>
+            <a:r>
+              <a:t>Instructor timing (title): Module I — FaaS &amp; Deviceless (ADV, +30–45 min)</a:t>
             </a:r>
           </a:p>
         </p:txBody>
@@ -1506,7 +1816,25 @@
           <a:lstStyle/>
           <a:p>
             <a:r>
-              <a:t>[CORE] 5 min</a:t>
+              <a:t>On this slide, Validation scripts &amp; lab hygiene.</a:t>
+            </a:r>
+          </a:p>
+          <a:p/>
+          <a:p>
+            <a:r>
+              <a:t>First, ./training/validate-lab.sh — core 18 checks after Module A–C. Next, ./training/validate-lab-multiboard.sh · validate-lab-vn.sh.</a:t>
+            </a:r>
+          </a:p>
+          <a:p/>
+          <a:p>
+            <a:r>
+              <a:t>By contrast, ./training/validate-lab-wstun.sh · validate-lab-fl.sh. We should also consider that Run relevant script before each module; fix failures before proceeding.</a:t>
+            </a:r>
+          </a:p>
+          <a:p/>
+          <a:p>
+            <a:r>
+              <a:t>If these objectives are clear, we can proceed.</a:t>
             </a:r>
           </a:p>
         </p:txBody>
@@ -1576,77 +1904,25 @@
           <a:lstStyle/>
           <a:p>
             <a:r>
-              <a:t>[CORE] 5 min</a:t>
-            </a:r>
-          </a:p>
-        </p:txBody>
-      </p:sp>
-      <p:sp>
-        <p:nvSpPr>
-          <p:cNvPr id="4" name="Slide Number Placeholder 3"/>
-          <p:cNvSpPr>
-            <a:spLocks noGrp="1"/>
-          </p:cNvSpPr>
-          <p:nvPr>
-            <p:ph type="sldNum" idx="5" sz="quarter"/>
-          </p:nvPr>
-        </p:nvSpPr>
-        <p:spPr/>
-      </p:sp>
-    </p:spTree>
-  </p:cSld>
-  <p:clrMapOvr>
-    <a:masterClrMapping/>
-  </p:clrMapOvr>
-</p:notes>
-</file>
-
-<file path=ppt/notesSlides/notesSlide24.xml><?xml version="1.0" encoding="utf-8"?>
-<p:notes xmlns:a="http://schemas.openxmlformats.org/drawingml/2006/main" xmlns:p="http://schemas.openxmlformats.org/presentationml/2006/main" xmlns:r="http://schemas.openxmlformats.org/officeDocument/2006/relationships">
-  <p:cSld>
-    <p:spTree>
-      <p:nvGrpSpPr>
-        <p:cNvPr id="1" name=""/>
-        <p:cNvGrpSpPr/>
-        <p:nvPr/>
-      </p:nvGrpSpPr>
-      <p:grpSpPr>
-        <a:xfrm>
-          <a:off x="0" y="0"/>
-          <a:ext cx="0" cy="0"/>
-          <a:chOff x="0" y="0"/>
-          <a:chExt cx="0" cy="0"/>
-        </a:xfrm>
-      </p:grpSpPr>
-      <p:sp>
-        <p:nvSpPr>
-          <p:cNvPr id="2" name="Slide Image Placeholder 1"/>
-          <p:cNvSpPr>
-            <a:spLocks noGrp="1"/>
-          </p:cNvSpPr>
-          <p:nvPr>
-            <p:ph type="sldImg" idx="2"/>
-          </p:nvPr>
-        </p:nvSpPr>
-        <p:spPr/>
-      </p:sp>
-      <p:sp>
-        <p:nvSpPr>
-          <p:cNvPr id="3" name="Notes Placeholder 2"/>
-          <p:cNvSpPr>
-            <a:spLocks noGrp="1"/>
-          </p:cNvSpPr>
-          <p:nvPr>
-            <p:ph type="body" idx="3" sz="quarter"/>
-          </p:nvPr>
-        </p:nvSpPr>
-        <p:spPr/>
-        <p:txBody>
-          <a:bodyPr/>
-          <a:lstStyle/>
-          <a:p>
-            <a:r>
-              <a:t>[CORE] 5 min</a:t>
+              <a:t>On this slide, Lab prerequisites.</a:t>
+            </a:r>
+          </a:p>
+          <a:p/>
+          <a:p>
+            <a:r>
+              <a:t>First, Docker and Docker Compose installed; user in the docker group. Next, regarding horizon, http://{{VM_IP}}/horizon — credentials admin / s4t.</a:t>
+            </a:r>
+          </a:p>
+          <a:p/>
+          <a:p>
+            <a:r>
+              <a:t>By contrast, regarding lightning-rod ui, http://{{VM_IP}}:1474 — credentials me / arancino. We should also consider that At least 4 GB free RAM (8 GB if running Module G or H).</a:t>
+            </a:r>
+          </a:p>
+          <a:p/>
+          <a:p>
+            <a:r>
+              <a:t>If these objectives are clear, we can proceed.</a:t>
             </a:r>
           </a:p>
         </p:txBody>
@@ -1716,7 +1992,31 @@
           <a:lstStyle/>
           <a:p>
             <a:r>
-              <a:t>[CORE] 5 min</a:t>
+              <a:t>In this slide we cover How to use these decks. This material is covered in training/docs/MODULES.md · placeholders.py.</a:t>
+            </a:r>
+          </a:p>
+          <a:p/>
+          <a:p>
+            <a:r>
+              <a:t>First, Each module combines book theory with live lab exercises on the Stack4Things VM. Next, regarding core path (3h), modules A + B + C — deploy, plugins, environmental data service.</a:t>
+            </a:r>
+          </a:p>
+          <a:p/>
+          <a:p>
+            <a:r>
+              <a:t>By contrast, regarding standard (6h), core plus multi-board fleet, virtual networking, and web services. We should also consider that regarding full (9h), all modules including federated learning, blueprint, and FaaS concepts.</a:t>
+            </a:r>
+          </a:p>
+          <a:p/>
+          <a:p>
+            <a:r>
+              <a:t>Another key point is that Lab URLs use {{VM_IP}} — resolved automatically when slides are built. Furthermore, Run validation scripts after each module to confirm the environment is healthy.</a:t>
+            </a:r>
+          </a:p>
+          <a:p/>
+          <a:p>
+            <a:r>
+              <a:t>I'll pause here for questions, then we'll continue.</a:t>
             </a:r>
           </a:p>
         </p:txBody>
@@ -1786,7 +2086,19 @@
           <a:lstStyle/>
           <a:p>
             <a:r>
-              <a:t>[CORE] 5 min</a:t>
+              <a:t>We now begin a new section: Lab workflow. End-to-end pipeline — UML sequence. In the next slides, listen for whether we are in theory mode or hands-on mode, and open your terminal when the slides turn to lab work.</a:t>
+            </a:r>
+          </a:p>
+          <a:p/>
+          <a:p>
+            <a:r>
+              <a:t>Session timing — Modular timing model:</a:t>
+            </a:r>
+          </a:p>
+          <a:p/>
+          <a:p>
+            <a:r>
+              <a:t>Session timing — Training paths — pick one:</a:t>
             </a:r>
           </a:p>
         </p:txBody>
@@ -1856,7 +2168,31 @@
           <a:lstStyle/>
           <a:p>
             <a:r>
-              <a:t>[CORE] 5 min</a:t>
+              <a:t>In this slide we cover Training lab workflow — five steps. This material is covered in scripts/build-all.sh · docs/MODULES.md.</a:t>
+            </a:r>
+          </a:p>
+          <a:p/>
+          <a:p>
+            <a:r>
+              <a:t>First, regarding step 1, clone AssemblingSmartCPS org repos (ch13, ch14, ch15, ch05, ch19, ch11) via scripts/clone-repos.sh. Next, regarding step 2, start Stack4Things with Docker Compose + training/patches/docker-compose.lab.yml overlay.</a:t>
+            </a:r>
+          </a:p>
+          <a:p/>
+          <a:p>
+            <a:r>
+              <a:t>By contrast, regarding step 3, run validate/validate-all.sh — all module checks must PASS before the session. We should also consider that regarding step 4, use pre-built PPTX in slides/ or regenerate with scripts/generate_diagrams.py + generate_slides_modular_en.py.</a:t>
+            </a:r>
+          </a:p>
+          <a:p/>
+          <a:p>
+            <a:r>
+              <a:t>Another key point is that regarding step 5, deliver modules A–I using Module*.pptx decks; re-run module validators after each lab block. Furthermore, regarding public repo, github.com/lucadagati/AssemblyingCPS_training.</a:t>
+            </a:r>
+          </a:p>
+          <a:p/>
+          <a:p>
+            <a:r>
+              <a:t>I'll pause here for questions, then we'll continue.</a:t>
             </a:r>
           </a:p>
         </p:txBody>
@@ -1926,7 +2262,7 @@
           <a:lstStyle/>
           <a:p>
             <a:r>
-              <a:t>[CORE] 5 min</a:t>
+              <a:t>Please look at the sequence diagram on screen: UML — End-to-end training workflow. Trace the diagram from left to right. Name each actor, the protocol used, and the message that crosses the cloud–edge boundary. In particular, note the following: Clone repos → Docker up → validate → generate slides → teach modules A–I. Take a few seconds to orient before we continue.</a:t>
             </a:r>
           </a:p>
         </p:txBody>
@@ -1996,7 +2332,31 @@
           <a:lstStyle/>
           <a:p>
             <a:r>
-              <a:t>[CORE] 5 min</a:t>
+              <a:t>In this slide we cover Per-module UML sequence diagrams. This material is covered in diagrams/seq-*.png · generate_diagrams.py.</a:t>
+            </a:r>
+          </a:p>
+          <a:p/>
+          <a:p>
+            <a:r>
+              <a:t>First, Each module deck includes sequence diagrams for the primary hands-on workflow (not only architecture boxes). Next, regarding module a, board onboarding — Horizon, then Conductor, then Crossbar, then Lightning-Rod, then Active.</a:t>
+            </a:r>
+          </a:p>
+          <a:p/>
+          <a:p>
+            <a:r>
+              <a:t>By contrast, regarding module b, sync Plugin Call — inject, then WAMP rpc, then Worker.run(), then result to Horizon. We should also consider that regarding module c, async loop — Start plugin, then CSV row, then InfluxDB every 30s.</a:t>
+            </a:r>
+          </a:p>
+          <a:p/>
+          <a:p>
+            <a:r>
+              <a:t>Another key point is that regarding module d, fleet inject to three boards · Module F: ServiceEnable + WSTUN tunnel. Furthermore, regarding module g, flower FedAvg round across three edge clients.</a:t>
+            </a:r>
+          </a:p>
+          <a:p/>
+          <a:p>
+            <a:r>
+              <a:t>I'll pause here for questions, then we'll continue.</a:t>
             </a:r>
           </a:p>
         </p:txBody>
@@ -2066,7 +2426,7 @@
           <a:lstStyle/>
           <a:p>
             <a:r>
-              <a:t>[CORE] 5 min</a:t>
+              <a:t>We now begin a new section: Book coverage map. Part II hands-on chapters → training modules. In the next slides, listen for whether we are in theory mode or hands-on mode, and open your terminal when the slides turn to lab work.</a:t>
             </a:r>
           </a:p>
         </p:txBody>
@@ -2136,7 +2496,31 @@
           <a:lstStyle/>
           <a:p>
             <a:r>
-              <a:t>[CORE] 5 min</a:t>
+              <a:t>In this slide we cover Part I background — when to read before labs. This material is covered in Book Part I · Ch.1–12 · intro.tex.</a:t>
+            </a:r>
+          </a:p>
+          <a:p/>
+          <a:p>
+            <a:r>
+              <a:t>First, regarding ch.1–3, cloud continuum foundations — context for why S4T extends OpenStack to IoT. Next, regarding ch.8, authentication and authorization — explains Keystone role in Horizon login.</a:t>
+            </a:r>
+          </a:p>
+          <a:p/>
+          <a:p>
+            <a:r>
+              <a:t>By contrast, regarding ch.9, heterogeneous compute — motivates edge vs cloud placement decisions in plugins. We should also consider that regarding ch.10, SLICES research infrastructure — precursor to Ch.11 Blueprint module.</a:t>
+            </a:r>
+          </a:p>
+          <a:p/>
+          <a:p>
+            <a:r>
+              <a:t>Another key point is that regarding ch.12, summary chapter — useful recap after completing core Modules A–C. Furthermore, Part I is referenced throughout decks; deep read of Ch.4 before Module A is essential.</a:t>
+            </a:r>
+          </a:p>
+          <a:p/>
+          <a:p>
+            <a:r>
+              <a:t>I'll pause here for questions, then we'll continue.</a:t>
             </a:r>
           </a:p>
         </p:txBody>
@@ -5312,7 +5696,7 @@
           <a:lstStyle/>
           <a:p>
             <a:pPr>
-              <a:defRPr sz="3800" b="1">
+              <a:defRPr sz="4000" b="1">
                 <a:solidFill>
                   <a:srgbClr val="FFFFFF"/>
                 </a:solidFill>
@@ -5351,7 +5735,7 @@
               <a:spcAft>
                 <a:spcPts val="400"/>
               </a:spcAft>
-              <a:defRPr sz="2000" b="0">
+              <a:defRPr sz="2200" b="0">
                 <a:solidFill>
                   <a:srgbClr val="B2EBF2"/>
                 </a:solidFill>
@@ -5359,7 +5743,7 @@
               </a:defRPr>
             </a:pPr>
             <a:r>
-              <a:t>3h core → 6h standard → 9h full · Lab VM {{VM_IP}}</a:t>
+              <a:t>Lab VM {{VM_IP}}</a:t>
             </a:r>
           </a:p>
         </p:txBody>
@@ -5457,7 +5841,7 @@
     <p:bg>
       <p:bgPr>
         <a:solidFill>
-          <a:srgbClr val="0D2B45"/>
+          <a:srgbClr val="F0F9FA"/>
         </a:solidFill>
         <a:effectLst/>
       </p:bgPr>
@@ -5477,8 +5861,8 @@
         </p:nvSpPr>
         <p:spPr>
           <a:xfrm>
-            <a:off x="0" y="3063240"/>
-            <a:ext cx="12191695" cy="54864"/>
+            <a:off x="0" y="0"/>
+            <a:ext cx="109728" cy="6858000"/>
           </a:xfrm>
           <a:prstGeom prst="rect">
             <a:avLst/>
@@ -5514,14 +5898,67 @@
       </p:sp>
       <p:sp>
         <p:nvSpPr>
-          <p:cNvPr id="3" name="TextBox 2"/>
+          <p:cNvPr id="3" name="Rounded Rectangle 2"/>
+          <p:cNvSpPr/>
+          <p:nvPr/>
+        </p:nvSpPr>
+        <p:spPr>
+          <a:xfrm>
+            <a:off x="502920" y="292608"/>
+            <a:ext cx="2011680" cy="310896"/>
+          </a:xfrm>
+          <a:prstGeom prst="roundRect">
+            <a:avLst/>
+          </a:prstGeom>
+          <a:solidFill>
+            <a:srgbClr val="008B9A"/>
+          </a:solidFill>
+          <a:ln>
+            <a:noFill/>
+          </a:ln>
+        </p:spPr>
+        <p:style>
+          <a:lnRef idx="1">
+            <a:schemeClr val="accent1"/>
+          </a:lnRef>
+          <a:fillRef idx="3">
+            <a:schemeClr val="accent1"/>
+          </a:fillRef>
+          <a:effectRef idx="2">
+            <a:schemeClr val="accent1"/>
+          </a:effectRef>
+          <a:fontRef idx="minor">
+            <a:schemeClr val="lt1"/>
+          </a:fontRef>
+        </p:style>
+        <p:txBody>
+          <a:bodyPr rtlCol="0" anchor="ctr"/>
+          <a:lstStyle/>
+          <a:p>
+            <a:pPr algn="ctr">
+              <a:defRPr sz="1100" b="1">
+                <a:solidFill>
+                  <a:srgbClr val="FFFFFF"/>
+                </a:solidFill>
+                <a:latin typeface="Calibri"/>
+              </a:defRPr>
+            </a:pPr>
+            <a:r>
+              <a:t>THEORY</a:t>
+            </a:r>
+          </a:p>
+        </p:txBody>
+      </p:sp>
+      <p:sp>
+        <p:nvSpPr>
+          <p:cNvPr id="4" name="TextBox 3"/>
           <p:cNvSpPr txBox="1"/>
           <p:nvPr/>
         </p:nvSpPr>
         <p:spPr>
           <a:xfrm>
-            <a:off x="731520" y="2148840"/>
-            <a:ext cx="10515600" cy="1097280"/>
+            <a:off x="7772400" y="292608"/>
+            <a:ext cx="4114800" cy="411480"/>
           </a:xfrm>
           <a:prstGeom prst="rect">
             <a:avLst/>
@@ -5534,30 +5971,30 @@
           </a:bodyPr>
           <a:lstStyle/>
           <a:p>
-            <a:pPr algn="ctr">
-              <a:defRPr sz="3600" b="1">
-                <a:solidFill>
-                  <a:srgbClr val="FFFFFF"/>
-                </a:solidFill>
-                <a:latin typeface="Calibri"/>
-              </a:defRPr>
-            </a:pPr>
-            <a:r>
-              <a:t>Book coverage map</a:t>
-            </a:r>
-          </a:p>
-        </p:txBody>
-      </p:sp>
-      <p:sp>
-        <p:nvSpPr>
-          <p:cNvPr id="4" name="TextBox 3"/>
+            <a:pPr algn="r">
+              <a:defRPr sz="1100" b="0">
+                <a:solidFill>
+                  <a:srgbClr val="78909C"/>
+                </a:solidFill>
+                <a:latin typeface="Calibri"/>
+              </a:defRPr>
+            </a:pPr>
+            <a:r>
+              <a:t>Book Part II · intro.tex · Ch.4 I/Ocloud</a:t>
+            </a:r>
+          </a:p>
+        </p:txBody>
+      </p:sp>
+      <p:sp>
+        <p:nvSpPr>
+          <p:cNvPr id="5" name="TextBox 4"/>
           <p:cNvSpPr txBox="1"/>
           <p:nvPr/>
         </p:nvSpPr>
         <p:spPr>
           <a:xfrm>
-            <a:off x="731520" y="3337560"/>
-            <a:ext cx="10515600" cy="822960"/>
+            <a:off x="594360" y="713232"/>
+            <a:ext cx="10972800" cy="868680"/>
           </a:xfrm>
           <a:prstGeom prst="rect">
             <a:avLst/>
@@ -5570,16 +6007,313 @@
           </a:bodyPr>
           <a:lstStyle/>
           <a:p>
-            <a:pPr algn="ctr">
-              <a:defRPr sz="2000" b="0">
-                <a:solidFill>
-                  <a:srgbClr val="B2EBF2"/>
-                </a:solidFill>
-                <a:latin typeface="Calibri"/>
-              </a:defRPr>
-            </a:pPr>
-            <a:r>
-              <a:t>Part II hands-on chapters → training modules</a:t>
+            <a:pPr>
+              <a:defRPr sz="2600" b="1">
+                <a:solidFill>
+                  <a:srgbClr val="0D2B45"/>
+                </a:solidFill>
+                <a:latin typeface="Calibri"/>
+              </a:defRPr>
+            </a:pPr>
+            <a:r>
+              <a:t>Core modules — Ch.4, Ch.13–15</a:t>
+            </a:r>
+          </a:p>
+        </p:txBody>
+      </p:sp>
+      <p:sp>
+        <p:nvSpPr>
+          <p:cNvPr id="6" name="Rounded Rectangle 5"/>
+          <p:cNvSpPr/>
+          <p:nvPr/>
+        </p:nvSpPr>
+        <p:spPr>
+          <a:xfrm>
+            <a:off x="502920" y="1554480"/>
+            <a:ext cx="11155680" cy="4800600"/>
+          </a:xfrm>
+          <a:prstGeom prst="roundRect">
+            <a:avLst/>
+          </a:prstGeom>
+          <a:solidFill>
+            <a:srgbClr val="FFFFFF"/>
+          </a:solidFill>
+          <a:ln w="9525">
+            <a:solidFill>
+              <a:srgbClr val="B2EBF2"/>
+            </a:solidFill>
+          </a:ln>
+        </p:spPr>
+        <p:style>
+          <a:lnRef idx="1">
+            <a:schemeClr val="accent1"/>
+          </a:lnRef>
+          <a:fillRef idx="3">
+            <a:schemeClr val="accent1"/>
+          </a:fillRef>
+          <a:effectRef idx="2">
+            <a:schemeClr val="accent1"/>
+          </a:effectRef>
+          <a:fontRef idx="minor">
+            <a:schemeClr val="lt1"/>
+          </a:fontRef>
+        </p:style>
+        <p:txBody>
+          <a:bodyPr rtlCol="0" anchor="ctr"/>
+          <a:lstStyle/>
+          <a:p>
+            <a:pPr algn="ctr"/>
+          </a:p>
+        </p:txBody>
+      </p:sp>
+      <p:sp>
+        <p:nvSpPr>
+          <p:cNvPr id="7" name="TextBox 6"/>
+          <p:cNvSpPr txBox="1"/>
+          <p:nvPr/>
+        </p:nvSpPr>
+        <p:spPr>
+          <a:xfrm>
+            <a:off x="777240" y="1673352"/>
+            <a:ext cx="10424160" cy="4572000"/>
+          </a:xfrm>
+          <a:prstGeom prst="rect">
+            <a:avLst/>
+          </a:prstGeom>
+          <a:noFill/>
+        </p:spPr>
+        <p:txBody>
+          <a:bodyPr wrap="square">
+            <a:spAutoFit/>
+          </a:bodyPr>
+          <a:lstStyle/>
+          <a:p>
+            <a:pPr>
+              <a:lnSpc>
+                <a:spcPct val="115000"/>
+              </a:lnSpc>
+              <a:spcAft>
+                <a:spcPts val="500"/>
+              </a:spcAft>
+              <a:defRPr sz="1600" b="0">
+                <a:solidFill>
+                  <a:srgbClr val="37474F"/>
+                </a:solidFill>
+                <a:latin typeface="Calibri"/>
+              </a:defRPr>
+            </a:pPr>
+            <a:r>
+              <a:t>▸  Ch.4 I/Ocloud foundations → context for Module A (Virtual Nodes, IoTronic)</a:t>
+            </a:r>
+          </a:p>
+          <a:p>
+            <a:pPr>
+              <a:lnSpc>
+                <a:spcPct val="115000"/>
+              </a:lnSpc>
+              <a:spcAft>
+                <a:spcPts val="500"/>
+              </a:spcAft>
+              <a:defRPr sz="1600" b="0">
+                <a:solidFill>
+                  <a:srgbClr val="37474F"/>
+                </a:solidFill>
+                <a:latin typeface="Calibri"/>
+              </a:defRPr>
+            </a:pPr>
+            <a:r>
+              <a:t>▸  Ch.13 Docker deploy + board onboarding → Module A: Active board deliverable</a:t>
+            </a:r>
+          </a:p>
+          <a:p>
+            <a:pPr>
+              <a:lnSpc>
+                <a:spcPct val="115000"/>
+              </a:lnSpc>
+              <a:spcAft>
+                <a:spcPts val="500"/>
+              </a:spcAft>
+              <a:defRPr sz="1600" b="0">
+                <a:solidFill>
+                  <a:srgbClr val="37474F"/>
+                </a:solidFill>
+                <a:latin typeface="Calibri"/>
+              </a:defRPr>
+            </a:pPr>
+            <a:r>
+              <a:t>▸  Ch.14 Plugins, fleet, web services → Module B sync HelloName + fleet preview</a:t>
+            </a:r>
+          </a:p>
+          <a:p>
+            <a:pPr>
+              <a:lnSpc>
+                <a:spcPct val="115000"/>
+              </a:lnSpc>
+              <a:spcAft>
+                <a:spcPts val="500"/>
+              </a:spcAft>
+              <a:defRPr sz="1600" b="0">
+                <a:solidFill>
+                  <a:srgbClr val="37474F"/>
+                </a:solidFill>
+                <a:latin typeface="Calibri"/>
+              </a:defRPr>
+            </a:pPr>
+            <a:r>
+              <a:t>▸  Ch.15 Environmental publisher + TOO(L)SMART → Module C async → InfluxDB</a:t>
+            </a:r>
+          </a:p>
+          <a:p>
+            <a:pPr>
+              <a:lnSpc>
+                <a:spcPct val="115000"/>
+              </a:lnSpc>
+              <a:spcAft>
+                <a:spcPts val="500"/>
+              </a:spcAft>
+              <a:defRPr sz="1600" b="0">
+                <a:solidFill>
+                  <a:srgbClr val="37474F"/>
+                </a:solidFill>
+                <a:latin typeface="Calibri"/>
+              </a:defRPr>
+            </a:pPr>
+            <a:r>
+              <a:t>▸  Part I chapters (Ch.1–12) provide theory referenced throughout core decks</a:t>
+            </a:r>
+          </a:p>
+          <a:p>
+            <a:pPr>
+              <a:lnSpc>
+                <a:spcPct val="115000"/>
+              </a:lnSpc>
+              <a:spcAft>
+                <a:spcPts val="500"/>
+              </a:spcAft>
+              <a:defRPr sz="1600" b="0">
+                <a:solidFill>
+                  <a:srgbClr val="37474F"/>
+                </a:solidFill>
+                <a:latin typeface="Calibri"/>
+              </a:defRPr>
+            </a:pPr>
+            <a:r>
+              <a:t>▸  Students should read Ch.13 abstract before Module A lab session</a:t>
+            </a:r>
+          </a:p>
+        </p:txBody>
+      </p:sp>
+      <p:sp>
+        <p:nvSpPr>
+          <p:cNvPr id="8" name="Rectangle 7"/>
+          <p:cNvSpPr/>
+          <p:nvPr/>
+        </p:nvSpPr>
+        <p:spPr>
+          <a:xfrm>
+            <a:off x="457200" y="6446520"/>
+            <a:ext cx="11274552" cy="18288"/>
+          </a:xfrm>
+          <a:prstGeom prst="rect">
+            <a:avLst/>
+          </a:prstGeom>
+          <a:solidFill>
+            <a:srgbClr val="B2EBF2"/>
+          </a:solidFill>
+          <a:ln>
+            <a:noFill/>
+          </a:ln>
+        </p:spPr>
+        <p:style>
+          <a:lnRef idx="1">
+            <a:schemeClr val="accent1"/>
+          </a:lnRef>
+          <a:fillRef idx="3">
+            <a:schemeClr val="accent1"/>
+          </a:fillRef>
+          <a:effectRef idx="2">
+            <a:schemeClr val="accent1"/>
+          </a:effectRef>
+          <a:fontRef idx="minor">
+            <a:schemeClr val="lt1"/>
+          </a:fontRef>
+        </p:style>
+        <p:txBody>
+          <a:bodyPr rtlCol="0" anchor="ctr"/>
+          <a:lstStyle/>
+          <a:p>
+            <a:pPr algn="ctr"/>
+          </a:p>
+        </p:txBody>
+      </p:sp>
+      <p:sp>
+        <p:nvSpPr>
+          <p:cNvPr id="9" name="TextBox 8"/>
+          <p:cNvSpPr txBox="1"/>
+          <p:nvPr/>
+        </p:nvSpPr>
+        <p:spPr>
+          <a:xfrm>
+            <a:off x="502920" y="6473952"/>
+            <a:ext cx="7315200" cy="320040"/>
+          </a:xfrm>
+          <a:prstGeom prst="rect">
+            <a:avLst/>
+          </a:prstGeom>
+          <a:noFill/>
+        </p:spPr>
+        <p:txBody>
+          <a:bodyPr wrap="none">
+            <a:spAutoFit/>
+          </a:bodyPr>
+          <a:lstStyle/>
+          <a:p>
+            <a:pPr>
+              <a:defRPr sz="900" b="0">
+                <a:solidFill>
+                  <a:srgbClr val="90A4AE"/>
+                </a:solidFill>
+                <a:latin typeface="Calibri"/>
+              </a:defRPr>
+            </a:pPr>
+            <a:r>
+              <a:t>Assembling Smart CPS · Stack4Things Training</a:t>
+            </a:r>
+          </a:p>
+        </p:txBody>
+      </p:sp>
+      <p:sp>
+        <p:nvSpPr>
+          <p:cNvPr id="10" name="TextBox 9"/>
+          <p:cNvSpPr txBox="1"/>
+          <p:nvPr/>
+        </p:nvSpPr>
+        <p:spPr>
+          <a:xfrm>
+            <a:off x="9326880" y="6455664"/>
+            <a:ext cx="2377440" cy="320040"/>
+          </a:xfrm>
+          <a:prstGeom prst="rect">
+            <a:avLst/>
+          </a:prstGeom>
+          <a:noFill/>
+        </p:spPr>
+        <p:txBody>
+          <a:bodyPr wrap="none">
+            <a:spAutoFit/>
+          </a:bodyPr>
+          <a:lstStyle/>
+          <a:p>
+            <a:pPr algn="r">
+              <a:defRPr sz="900" b="1">
+                <a:solidFill>
+                  <a:srgbClr val="008B9A"/>
+                </a:solidFill>
+                <a:latin typeface="Calibri"/>
+              </a:defRPr>
+            </a:pPr>
+            <a:r>
+              <a:t>Theory</a:t>
             </a:r>
           </a:p>
         </p:txBody>
@@ -5729,7 +6463,7 @@
           <a:lstStyle/>
           <a:p>
             <a:pPr algn="r">
-              <a:defRPr sz="1000" b="0">
+              <a:defRPr sz="1100" b="0">
                 <a:solidFill>
                   <a:srgbClr val="78909C"/>
                 </a:solidFill>
@@ -5737,7 +6471,7 @@
               </a:defRPr>
             </a:pPr>
             <a:r>
-              <a:t>Book Part I · Ch.1–12 · intro.tex</a:t>
+              <a:t>Ch.5 · Ch.6 · Ch.14 §14.2–14.3</a:t>
             </a:r>
           </a:p>
         </p:txBody>
@@ -5765,7 +6499,7 @@
           <a:lstStyle/>
           <a:p>
             <a:pPr>
-              <a:defRPr sz="2400" b="1">
+              <a:defRPr sz="2600" b="1">
                 <a:solidFill>
                   <a:srgbClr val="0D2B45"/>
                 </a:solidFill>
@@ -5773,7 +6507,7 @@
               </a:defRPr>
             </a:pPr>
             <a:r>
-              <a:t>Part I background — when to read before labs</a:t>
+              <a:t>Extension modules — Ch.5, Ch.6, Ch.14</a:t>
             </a:r>
           </a:p>
         </p:txBody>
@@ -5787,7 +6521,7 @@
         <p:spPr>
           <a:xfrm>
             <a:off x="502920" y="1554480"/>
-            <a:ext cx="11155680" cy="2651759"/>
+            <a:ext cx="11155680" cy="4800600"/>
           </a:xfrm>
           <a:prstGeom prst="roundRect">
             <a:avLst/>
@@ -5832,7 +6566,7 @@
         <p:spPr>
           <a:xfrm>
             <a:off x="777240" y="1673352"/>
-            <a:ext cx="10424160" cy="2468879"/>
+            <a:ext cx="10424160" cy="4572000"/>
           </a:xfrm>
           <a:prstGeom prst="rect">
             <a:avLst/>
@@ -5852,7 +6586,7 @@
               <a:spcAft>
                 <a:spcPts val="500"/>
               </a:spcAft>
-              <a:defRPr sz="1500" b="0">
+              <a:defRPr sz="1600" b="0">
                 <a:solidFill>
                   <a:srgbClr val="37474F"/>
                 </a:solidFill>
@@ -5860,7 +6594,7 @@
               </a:defRPr>
             </a:pPr>
             <a:r>
-              <a:t>▸  Ch.1–3: cloud continuum foundations — context for why S4T extends OpenStack to IoT.</a:t>
+              <a:t>▸  Ch.5 Virtual networking attach-port → Module E: IoTronic ports API workflow</a:t>
             </a:r>
           </a:p>
           <a:p>
@@ -5871,7 +6605,7 @@
               <a:spcAft>
                 <a:spcPts val="500"/>
               </a:spcAft>
-              <a:defRPr sz="1500" b="0">
+              <a:defRPr sz="1600" b="0">
                 <a:solidFill>
                   <a:srgbClr val="37474F"/>
                 </a:solidFill>
@@ -5879,7 +6613,7 @@
               </a:defRPr>
             </a:pPr>
             <a:r>
-              <a:t>▸  Ch.8: authentication and authorization — explains Keystone role in Horizon login.</a:t>
+              <a:t>▸  Ch.6 Web of Things layered model → Module F: gateway WoT before WSTUN demo</a:t>
             </a:r>
           </a:p>
           <a:p>
@@ -5890,7 +6624,7 @@
               <a:spcAft>
                 <a:spcPts val="500"/>
               </a:spcAft>
-              <a:defRPr sz="1500" b="0">
+              <a:defRPr sz="1600" b="0">
                 <a:solidFill>
                   <a:srgbClr val="37474F"/>
                 </a:solidFill>
@@ -5898,7 +6632,7 @@
               </a:defRPr>
             </a:pPr>
             <a:r>
-              <a:t>▸  Ch.9: heterogeneous compute — motivates edge vs cloud placement decisions in plugins.</a:t>
+              <a:t>▸  Ch.14 Fleet operations + Web Services Manager → Module D fleet inject + Module F</a:t>
             </a:r>
           </a:p>
           <a:p>
@@ -5909,7 +6643,7 @@
               <a:spcAft>
                 <a:spcPts val="500"/>
               </a:spcAft>
-              <a:defRPr sz="1500" b="0">
+              <a:defRPr sz="1600" b="0">
                 <a:solidFill>
                   <a:srgbClr val="37474F"/>
                 </a:solidFill>
@@ -5917,7 +6651,7 @@
               </a:defRPr>
             </a:pPr>
             <a:r>
-              <a:t>▸  Ch.10: SLICES research infrastructure — precursor to Ch.11 Blueprint module.</a:t>
+              <a:t>▸  Extension tier adds per module; D is prerequisite for G (FL clients)</a:t>
             </a:r>
           </a:p>
           <a:p>
@@ -5928,7 +6662,7 @@
               <a:spcAft>
                 <a:spcPts val="500"/>
               </a:spcAft>
-              <a:defRPr sz="1500" b="0">
+              <a:defRPr sz="1600" b="0">
                 <a:solidFill>
                   <a:srgbClr val="37474F"/>
                 </a:solidFill>
@@ -5936,7 +6670,7 @@
               </a:defRPr>
             </a:pPr>
             <a:r>
-              <a:t>▸  Ch.12: summary chapter — useful recap after completing core Modules A–C.</a:t>
+              <a:t>▸  Module F contrasts book weather server :8080 with lab nginx :50000 tunnel demo</a:t>
             </a:r>
           </a:p>
           <a:p>
@@ -5947,7 +6681,7 @@
               <a:spcAft>
                 <a:spcPts val="500"/>
               </a:spcAft>
-              <a:defRPr sz="1500" b="0">
+              <a:defRPr sz="1600" b="0">
                 <a:solidFill>
                   <a:srgbClr val="37474F"/>
                 </a:solidFill>
@@ -5955,7 +6689,7 @@
               </a:defRPr>
             </a:pPr>
             <a:r>
-              <a:t>▸  Part I is referenced throughout decks; deep read of Ch.4 before Module A is essential.</a:t>
+              <a:t>▸  All extension decks use {{VM_IP}} for Horizon, API, and curl examples</a:t>
             </a:r>
           </a:p>
         </p:txBody>
@@ -6220,7 +6954,7 @@
           <a:lstStyle/>
           <a:p>
             <a:pPr algn="r">
-              <a:defRPr sz="1000" b="0">
+              <a:defRPr sz="1100" b="0">
                 <a:solidFill>
                   <a:srgbClr val="78909C"/>
                 </a:solidFill>
@@ -6228,7 +6962,7 @@
               </a:defRPr>
             </a:pPr>
             <a:r>
-              <a:t>Book Part II · intro.tex · Ch.4 I/Ocloud</a:t>
+              <a:t>Ch.7 · Ch.11 · Ch.19</a:t>
             </a:r>
           </a:p>
         </p:txBody>
@@ -6256,7 +6990,7 @@
           <a:lstStyle/>
           <a:p>
             <a:pPr>
-              <a:defRPr sz="2400" b="1">
+              <a:defRPr sz="2600" b="1">
                 <a:solidFill>
                   <a:srgbClr val="0D2B45"/>
                 </a:solidFill>
@@ -6264,7 +6998,7 @@
               </a:defRPr>
             </a:pPr>
             <a:r>
-              <a:t>Core modules — Ch.4, Ch.13–15</a:t>
+              <a:t>Advanced modules — Ch.7, Ch.11, Ch.19</a:t>
             </a:r>
           </a:p>
         </p:txBody>
@@ -6278,7 +7012,7 @@
         <p:spPr>
           <a:xfrm>
             <a:off x="502920" y="1554480"/>
-            <a:ext cx="11155680" cy="2651759"/>
+            <a:ext cx="11155680" cy="4800600"/>
           </a:xfrm>
           <a:prstGeom prst="roundRect">
             <a:avLst/>
@@ -6323,7 +7057,7 @@
         <p:spPr>
           <a:xfrm>
             <a:off x="777240" y="1673352"/>
-            <a:ext cx="10424160" cy="2468879"/>
+            <a:ext cx="10424160" cy="4572000"/>
           </a:xfrm>
           <a:prstGeom prst="rect">
             <a:avLst/>
@@ -6343,7 +7077,7 @@
               <a:spcAft>
                 <a:spcPts val="500"/>
               </a:spcAft>
-              <a:defRPr sz="1500" b="0">
+              <a:defRPr sz="1600" b="0">
                 <a:solidFill>
                   <a:srgbClr val="37474F"/>
                 </a:solidFill>
@@ -6351,7 +7085,7 @@
               </a:defRPr>
             </a:pPr>
             <a:r>
-              <a:t>▸  Ch.4 I/Ocloud foundations → context for Module A (Virtual Nodes, IoTronic)</a:t>
+              <a:t>▸  Ch.19 Federated Learning on edge boards → Module G: Flower + 3 LR clients</a:t>
             </a:r>
           </a:p>
           <a:p>
@@ -6362,7 +7096,7 @@
               <a:spcAft>
                 <a:spcPts val="500"/>
               </a:spcAft>
-              <a:defRPr sz="1500" b="0">
+              <a:defRPr sz="1600" b="0">
                 <a:solidFill>
                   <a:srgbClr val="37474F"/>
                 </a:solidFill>
@@ -6370,7 +7104,7 @@
               </a:defRPr>
             </a:pPr>
             <a:r>
-              <a:t>▸  Ch.13 Docker deploy + board onboarding → Module A: Active board deliverable</a:t>
+              <a:t>▸  Ch.11 SLICES Blueprint + Crossplane + K3s → Module H: declarative IoT GitOps</a:t>
             </a:r>
           </a:p>
           <a:p>
@@ -6381,7 +7115,7 @@
               <a:spcAft>
                 <a:spcPts val="500"/>
               </a:spcAft>
-              <a:defRPr sz="1500" b="0">
+              <a:defRPr sz="1600" b="0">
                 <a:solidFill>
                   <a:srgbClr val="37474F"/>
                 </a:solidFill>
@@ -6389,7 +7123,7 @@
               </a:defRPr>
             </a:pPr>
             <a:r>
-              <a:t>▸  Ch.14 Plugins, fleet, web services → Module B sync HelloName + fleet preview</a:t>
+              <a:t>▸  Ch.7 FaaS / Deviceless paradigm → Module I: sync vs async plugin contrast</a:t>
             </a:r>
           </a:p>
           <a:p>
@@ -6400,7 +7134,7 @@
               <a:spcAft>
                 <a:spcPts val="500"/>
               </a:spcAft>
-              <a:defRPr sz="1500" b="0">
+              <a:defRPr sz="1600" b="0">
                 <a:solidFill>
                   <a:srgbClr val="37474F"/>
                 </a:solidFill>
@@ -6408,7 +7142,7 @@
               </a:defRPr>
             </a:pPr>
             <a:r>
-              <a:t>▸  Ch.15 Environmental publisher + TOO(L)SMART → Module C async → InfluxDB</a:t>
+              <a:t>▸  Advanced tier: theory-heavy; Module H benefits from a pre-provisioned K3s cluster.</a:t>
             </a:r>
           </a:p>
           <a:p>
@@ -6419,7 +7153,7 @@
               <a:spcAft>
                 <a:spcPts val="500"/>
               </a:spcAft>
-              <a:defRPr sz="1500" b="0">
+              <a:defRPr sz="1600" b="0">
                 <a:solidFill>
                   <a:srgbClr val="37474F"/>
                 </a:solidFill>
@@ -6427,7 +7161,7 @@
               </a:defRPr>
             </a:pPr>
             <a:r>
-              <a:t>▸  Part I chapters (Ch.1–12) provide theory referenced throughout core decks</a:t>
+              <a:t>▸  Module G needs Module D complete (3 Active boards on :1474/:1475/:1476)</a:t>
             </a:r>
           </a:p>
           <a:p>
@@ -6438,7 +7172,7 @@
               <a:spcAft>
                 <a:spcPts val="500"/>
               </a:spcAft>
-              <a:defRPr sz="1500" b="0">
+              <a:defRPr sz="1600" b="0">
                 <a:solidFill>
                   <a:srgbClr val="37474F"/>
                 </a:solidFill>
@@ -6446,7 +7180,7 @@
               </a:defRPr>
             </a:pPr>
             <a:r>
-              <a:t>▸  Students should read Ch.13 abstract before Module A lab session</a:t>
+              <a:t>▸  Module H K3s install should run overnight — do NOT concurrent with Module G</a:t>
             </a:r>
           </a:p>
         </p:txBody>
@@ -6580,7 +7314,7 @@
     <p:bg>
       <p:bgPr>
         <a:solidFill>
-          <a:srgbClr val="F0F9FA"/>
+          <a:srgbClr val="F8FAFC"/>
         </a:solidFill>
         <a:effectLst/>
       </p:bgPr>
@@ -6601,13 +7335,13 @@
         <p:spPr>
           <a:xfrm>
             <a:off x="0" y="0"/>
-            <a:ext cx="109728" cy="6858000"/>
+            <a:ext cx="12191695" cy="54864"/>
           </a:xfrm>
           <a:prstGeom prst="rect">
             <a:avLst/>
           </a:prstGeom>
           <a:solidFill>
-            <a:srgbClr val="008B9A"/>
+            <a:srgbClr val="1A4A6E"/>
           </a:solidFill>
           <a:ln>
             <a:noFill/>
@@ -6637,67 +7371,14 @@
       </p:sp>
       <p:sp>
         <p:nvSpPr>
-          <p:cNvPr id="3" name="Rounded Rectangle 2"/>
-          <p:cNvSpPr/>
-          <p:nvPr/>
-        </p:nvSpPr>
-        <p:spPr>
-          <a:xfrm>
-            <a:off x="502920" y="292608"/>
-            <a:ext cx="2011680" cy="310896"/>
-          </a:xfrm>
-          <a:prstGeom prst="roundRect">
-            <a:avLst/>
-          </a:prstGeom>
-          <a:solidFill>
-            <a:srgbClr val="008B9A"/>
-          </a:solidFill>
-          <a:ln>
-            <a:noFill/>
-          </a:ln>
-        </p:spPr>
-        <p:style>
-          <a:lnRef idx="1">
-            <a:schemeClr val="accent1"/>
-          </a:lnRef>
-          <a:fillRef idx="3">
-            <a:schemeClr val="accent1"/>
-          </a:fillRef>
-          <a:effectRef idx="2">
-            <a:schemeClr val="accent1"/>
-          </a:effectRef>
-          <a:fontRef idx="minor">
-            <a:schemeClr val="lt1"/>
-          </a:fontRef>
-        </p:style>
-        <p:txBody>
-          <a:bodyPr rtlCol="0" anchor="ctr"/>
-          <a:lstStyle/>
-          <a:p>
-            <a:pPr algn="ctr">
-              <a:defRPr sz="1100" b="1">
-                <a:solidFill>
-                  <a:srgbClr val="FFFFFF"/>
-                </a:solidFill>
-                <a:latin typeface="Calibri"/>
-              </a:defRPr>
-            </a:pPr>
-            <a:r>
-              <a:t>THEORY</a:t>
-            </a:r>
-          </a:p>
-        </p:txBody>
-      </p:sp>
-      <p:sp>
-        <p:nvSpPr>
-          <p:cNvPr id="4" name="TextBox 3"/>
+          <p:cNvPr id="3" name="TextBox 2"/>
           <p:cNvSpPr txBox="1"/>
           <p:nvPr/>
         </p:nvSpPr>
         <p:spPr>
           <a:xfrm>
-            <a:off x="7772400" y="292608"/>
-            <a:ext cx="4114800" cy="411480"/>
+            <a:off x="594360" y="502920"/>
+            <a:ext cx="10972800" cy="868680"/>
           </a:xfrm>
           <a:prstGeom prst="rect">
             <a:avLst/>
@@ -6710,44 +7391,8 @@
           </a:bodyPr>
           <a:lstStyle/>
           <a:p>
-            <a:pPr algn="r">
-              <a:defRPr sz="1000" b="0">
-                <a:solidFill>
-                  <a:srgbClr val="78909C"/>
-                </a:solidFill>
-                <a:latin typeface="Calibri"/>
-              </a:defRPr>
-            </a:pPr>
-            <a:r>
-              <a:t>Ch.5 · Ch.6 · Ch.14 §14.2–14.3</a:t>
-            </a:r>
-          </a:p>
-        </p:txBody>
-      </p:sp>
-      <p:sp>
-        <p:nvSpPr>
-          <p:cNvPr id="5" name="TextBox 4"/>
-          <p:cNvSpPr txBox="1"/>
-          <p:nvPr/>
-        </p:nvSpPr>
-        <p:spPr>
-          <a:xfrm>
-            <a:off x="594360" y="713232"/>
-            <a:ext cx="10972800" cy="868680"/>
-          </a:xfrm>
-          <a:prstGeom prst="rect">
-            <a:avLst/>
-          </a:prstGeom>
-          <a:noFill/>
-        </p:spPr>
-        <p:txBody>
-          <a:bodyPr wrap="none">
-            <a:spAutoFit/>
-          </a:bodyPr>
-          <a:lstStyle/>
-          <a:p>
             <a:pPr>
-              <a:defRPr sz="2400" b="1">
+              <a:defRPr sz="3000" b="1">
                 <a:solidFill>
                   <a:srgbClr val="0D2B45"/>
                 </a:solidFill>
@@ -6755,21 +7400,21 @@
               </a:defRPr>
             </a:pPr>
             <a:r>
-              <a:t>Extension modules — Ch.5, Ch.6, Ch.14</a:t>
-            </a:r>
-          </a:p>
-        </p:txBody>
-      </p:sp>
-      <p:sp>
-        <p:nvSpPr>
-          <p:cNvPr id="6" name="Rounded Rectangle 5"/>
+              <a:t>Module A — Deploy I/Ocloud</a:t>
+            </a:r>
+          </a:p>
+        </p:txBody>
+      </p:sp>
+      <p:sp>
+        <p:nvSpPr>
+          <p:cNvPr id="4" name="Rounded Rectangle 3"/>
           <p:cNvSpPr/>
           <p:nvPr/>
         </p:nvSpPr>
         <p:spPr>
           <a:xfrm>
-            <a:off x="502920" y="1554480"/>
-            <a:ext cx="11155680" cy="2651759"/>
+            <a:off x="502920" y="1344168"/>
+            <a:ext cx="11155680" cy="5010912"/>
           </a:xfrm>
           <a:prstGeom prst="roundRect">
             <a:avLst/>
@@ -6807,14 +7452,14 @@
       </p:sp>
       <p:sp>
         <p:nvSpPr>
-          <p:cNvPr id="7" name="TextBox 6"/>
+          <p:cNvPr id="5" name="TextBox 4"/>
           <p:cNvSpPr txBox="1"/>
           <p:nvPr/>
         </p:nvSpPr>
         <p:spPr>
           <a:xfrm>
-            <a:off x="777240" y="1673352"/>
-            <a:ext cx="10424160" cy="2468879"/>
+            <a:off x="777240" y="1463040"/>
+            <a:ext cx="10424160" cy="4782312"/>
           </a:xfrm>
           <a:prstGeom prst="rect">
             <a:avLst/>
@@ -6832,9 +7477,9 @@
                 <a:spcPct val="115000"/>
               </a:lnSpc>
               <a:spcAft>
-                <a:spcPts val="500"/>
+                <a:spcPts val="800"/>
               </a:spcAft>
-              <a:defRPr sz="1500" b="0">
+              <a:defRPr sz="1900" b="0">
                 <a:solidFill>
                   <a:srgbClr val="37474F"/>
                 </a:solidFill>
@@ -6842,7 +7487,7 @@
               </a:defRPr>
             </a:pPr>
             <a:r>
-              <a:t>▸  Ch.5 Virtual networking attach-port → Module E: IoTronic ports API workflow</a:t>
+              <a:t>▸  Ch.13 + Ch.4 · Docker Compose + board onboarding → Active board in Horizon</a:t>
             </a:r>
           </a:p>
           <a:p>
@@ -6851,9 +7496,9 @@
                 <a:spcPct val="115000"/>
               </a:lnSpc>
               <a:spcAft>
-                <a:spcPts val="500"/>
+                <a:spcPts val="800"/>
               </a:spcAft>
-              <a:defRPr sz="1500" b="0">
+              <a:defRPr sz="1900" b="0">
                 <a:solidFill>
                   <a:srgbClr val="37474F"/>
                 </a:solidFill>
@@ -6861,7 +7506,7 @@
               </a:defRPr>
             </a:pPr>
             <a:r>
-              <a:t>▸  Ch.6 Web of Things layered model → Module F: gateway WoT before WSTUN demo</a:t>
+              <a:t>▸  Deck: ModuleA_Deploy_IOcloud_EN.pptx</a:t>
             </a:r>
           </a:p>
           <a:p>
@@ -6870,9 +7515,9 @@
                 <a:spcPct val="115000"/>
               </a:lnSpc>
               <a:spcAft>
-                <a:spcPts val="500"/>
+                <a:spcPts val="800"/>
               </a:spcAft>
-              <a:defRPr sz="1500" b="0">
+              <a:defRPr sz="1900" b="0">
                 <a:solidFill>
                   <a:srgbClr val="37474F"/>
                 </a:solidFill>
@@ -6880,71 +7525,14 @@
               </a:defRPr>
             </a:pPr>
             <a:r>
-              <a:t>▸  Ch.14 Fleet operations + Web Services Manager → Module D fleet inject + Module F</a:t>
-            </a:r>
-          </a:p>
-          <a:p>
-            <a:pPr>
-              <a:lnSpc>
-                <a:spcPct val="115000"/>
-              </a:lnSpc>
-              <a:spcAft>
-                <a:spcPts val="500"/>
-              </a:spcAft>
-              <a:defRPr sz="1500" b="0">
-                <a:solidFill>
-                  <a:srgbClr val="37474F"/>
-                </a:solidFill>
-                <a:latin typeface="Calibri"/>
-              </a:defRPr>
-            </a:pPr>
-            <a:r>
-              <a:t>▸  Extension tier adds +45–60 min per module; D is prerequisite for G (FL clients)</a:t>
-            </a:r>
-          </a:p>
-          <a:p>
-            <a:pPr>
-              <a:lnSpc>
-                <a:spcPct val="115000"/>
-              </a:lnSpc>
-              <a:spcAft>
-                <a:spcPts val="500"/>
-              </a:spcAft>
-              <a:defRPr sz="1500" b="0">
-                <a:solidFill>
-                  <a:srgbClr val="37474F"/>
-                </a:solidFill>
-                <a:latin typeface="Calibri"/>
-              </a:defRPr>
-            </a:pPr>
-            <a:r>
-              <a:t>▸  Module F contrasts book weather server :8080 with lab nginx :50000 tunnel demo</a:t>
-            </a:r>
-          </a:p>
-          <a:p>
-            <a:pPr>
-              <a:lnSpc>
-                <a:spcPct val="115000"/>
-              </a:lnSpc>
-              <a:spcAft>
-                <a:spcPts val="500"/>
-              </a:spcAft>
-              <a:defRPr sz="1500" b="0">
-                <a:solidFill>
-                  <a:srgbClr val="37474F"/>
-                </a:solidFill>
-                <a:latin typeface="Calibri"/>
-              </a:defRPr>
-            </a:pPr>
-            <a:r>
-              <a:t>▸  All extension decks use {{VM_IP}} for Horizon, API, and curl examples</a:t>
-            </a:r>
-          </a:p>
-        </p:txBody>
-      </p:sp>
-      <p:sp>
-        <p:nvSpPr>
-          <p:cNvPr id="8" name="Rectangle 7"/>
+              <a:t>▸  Validate: ./training/validate-lab.sh (18 core checks)</a:t>
+            </a:r>
+          </a:p>
+        </p:txBody>
+      </p:sp>
+      <p:sp>
+        <p:nvSpPr>
+          <p:cNvPr id="6" name="Rectangle 5"/>
           <p:cNvSpPr/>
           <p:nvPr/>
         </p:nvSpPr>
@@ -6987,7 +7575,7 @@
       </p:sp>
       <p:sp>
         <p:nvSpPr>
-          <p:cNvPr id="9" name="TextBox 8"/>
+          <p:cNvPr id="7" name="TextBox 6"/>
           <p:cNvSpPr txBox="1"/>
           <p:nvPr/>
         </p:nvSpPr>
@@ -7017,42 +7605,6 @@
             </a:pPr>
             <a:r>
               <a:t>Assembling Smart CPS · Stack4Things Training</a:t>
-            </a:r>
-          </a:p>
-        </p:txBody>
-      </p:sp>
-      <p:sp>
-        <p:nvSpPr>
-          <p:cNvPr id="10" name="TextBox 9"/>
-          <p:cNvSpPr txBox="1"/>
-          <p:nvPr/>
-        </p:nvSpPr>
-        <p:spPr>
-          <a:xfrm>
-            <a:off x="9326880" y="6455664"/>
-            <a:ext cx="2377440" cy="320040"/>
-          </a:xfrm>
-          <a:prstGeom prst="rect">
-            <a:avLst/>
-          </a:prstGeom>
-          <a:noFill/>
-        </p:spPr>
-        <p:txBody>
-          <a:bodyPr wrap="none">
-            <a:spAutoFit/>
-          </a:bodyPr>
-          <a:lstStyle/>
-          <a:p>
-            <a:pPr algn="r">
-              <a:defRPr sz="900" b="1">
-                <a:solidFill>
-                  <a:srgbClr val="008B9A"/>
-                </a:solidFill>
-                <a:latin typeface="Calibri"/>
-              </a:defRPr>
-            </a:pPr>
-            <a:r>
-              <a:t>Theory</a:t>
             </a:r>
           </a:p>
         </p:txBody>
@@ -7071,7 +7623,7 @@
     <p:bg>
       <p:bgPr>
         <a:solidFill>
-          <a:srgbClr val="F0F9FA"/>
+          <a:srgbClr val="F8FAFC"/>
         </a:solidFill>
         <a:effectLst/>
       </p:bgPr>
@@ -7092,13 +7644,13 @@
         <p:spPr>
           <a:xfrm>
             <a:off x="0" y="0"/>
-            <a:ext cx="109728" cy="6858000"/>
+            <a:ext cx="12191695" cy="54864"/>
           </a:xfrm>
           <a:prstGeom prst="rect">
             <a:avLst/>
           </a:prstGeom>
           <a:solidFill>
-            <a:srgbClr val="008B9A"/>
+            <a:srgbClr val="1A4A6E"/>
           </a:solidFill>
           <a:ln>
             <a:noFill/>
@@ -7128,67 +7680,14 @@
       </p:sp>
       <p:sp>
         <p:nvSpPr>
-          <p:cNvPr id="3" name="Rounded Rectangle 2"/>
-          <p:cNvSpPr/>
-          <p:nvPr/>
-        </p:nvSpPr>
-        <p:spPr>
-          <a:xfrm>
-            <a:off x="502920" y="292608"/>
-            <a:ext cx="2011680" cy="310896"/>
-          </a:xfrm>
-          <a:prstGeom prst="roundRect">
-            <a:avLst/>
-          </a:prstGeom>
-          <a:solidFill>
-            <a:srgbClr val="008B9A"/>
-          </a:solidFill>
-          <a:ln>
-            <a:noFill/>
-          </a:ln>
-        </p:spPr>
-        <p:style>
-          <a:lnRef idx="1">
-            <a:schemeClr val="accent1"/>
-          </a:lnRef>
-          <a:fillRef idx="3">
-            <a:schemeClr val="accent1"/>
-          </a:fillRef>
-          <a:effectRef idx="2">
-            <a:schemeClr val="accent1"/>
-          </a:effectRef>
-          <a:fontRef idx="minor">
-            <a:schemeClr val="lt1"/>
-          </a:fontRef>
-        </p:style>
-        <p:txBody>
-          <a:bodyPr rtlCol="0" anchor="ctr"/>
-          <a:lstStyle/>
-          <a:p>
-            <a:pPr algn="ctr">
-              <a:defRPr sz="1100" b="1">
-                <a:solidFill>
-                  <a:srgbClr val="FFFFFF"/>
-                </a:solidFill>
-                <a:latin typeface="Calibri"/>
-              </a:defRPr>
-            </a:pPr>
-            <a:r>
-              <a:t>THEORY</a:t>
-            </a:r>
-          </a:p>
-        </p:txBody>
-      </p:sp>
-      <p:sp>
-        <p:nvSpPr>
-          <p:cNvPr id="4" name="TextBox 3"/>
+          <p:cNvPr id="3" name="TextBox 2"/>
           <p:cNvSpPr txBox="1"/>
           <p:nvPr/>
         </p:nvSpPr>
         <p:spPr>
           <a:xfrm>
-            <a:off x="7772400" y="292608"/>
-            <a:ext cx="4114800" cy="411480"/>
+            <a:off x="594360" y="502920"/>
+            <a:ext cx="10972800" cy="868680"/>
           </a:xfrm>
           <a:prstGeom prst="rect">
             <a:avLst/>
@@ -7201,44 +7700,8 @@
           </a:bodyPr>
           <a:lstStyle/>
           <a:p>
-            <a:pPr algn="r">
-              <a:defRPr sz="1000" b="0">
-                <a:solidFill>
-                  <a:srgbClr val="78909C"/>
-                </a:solidFill>
-                <a:latin typeface="Calibri"/>
-              </a:defRPr>
-            </a:pPr>
-            <a:r>
-              <a:t>Ch.7 · Ch.11 · Ch.19</a:t>
-            </a:r>
-          </a:p>
-        </p:txBody>
-      </p:sp>
-      <p:sp>
-        <p:nvSpPr>
-          <p:cNvPr id="5" name="TextBox 4"/>
-          <p:cNvSpPr txBox="1"/>
-          <p:nvPr/>
-        </p:nvSpPr>
-        <p:spPr>
-          <a:xfrm>
-            <a:off x="594360" y="713232"/>
-            <a:ext cx="10972800" cy="868680"/>
-          </a:xfrm>
-          <a:prstGeom prst="rect">
-            <a:avLst/>
-          </a:prstGeom>
-          <a:noFill/>
-        </p:spPr>
-        <p:txBody>
-          <a:bodyPr wrap="none">
-            <a:spAutoFit/>
-          </a:bodyPr>
-          <a:lstStyle/>
-          <a:p>
             <a:pPr>
-              <a:defRPr sz="2400" b="1">
+              <a:defRPr sz="3000" b="1">
                 <a:solidFill>
                   <a:srgbClr val="0D2B45"/>
                 </a:solidFill>
@@ -7246,21 +7709,21 @@
               </a:defRPr>
             </a:pPr>
             <a:r>
-              <a:t>Advanced modules — Ch.7, Ch.11, Ch.19</a:t>
-            </a:r>
-          </a:p>
-        </p:txBody>
-      </p:sp>
-      <p:sp>
-        <p:nvSpPr>
-          <p:cNvPr id="6" name="Rounded Rectangle 5"/>
+              <a:t>Module B — Plugins &amp; Services</a:t>
+            </a:r>
+          </a:p>
+        </p:txBody>
+      </p:sp>
+      <p:sp>
+        <p:nvSpPr>
+          <p:cNvPr id="4" name="Rounded Rectangle 3"/>
           <p:cNvSpPr/>
           <p:nvPr/>
         </p:nvSpPr>
         <p:spPr>
           <a:xfrm>
-            <a:off x="502920" y="1554480"/>
-            <a:ext cx="11155680" cy="2651759"/>
+            <a:off x="502920" y="1344168"/>
+            <a:ext cx="11155680" cy="5010912"/>
           </a:xfrm>
           <a:prstGeom prst="roundRect">
             <a:avLst/>
@@ -7298,14 +7761,14 @@
       </p:sp>
       <p:sp>
         <p:nvSpPr>
-          <p:cNvPr id="7" name="TextBox 6"/>
+          <p:cNvPr id="5" name="TextBox 4"/>
           <p:cNvSpPr txBox="1"/>
           <p:nvPr/>
         </p:nvSpPr>
         <p:spPr>
           <a:xfrm>
-            <a:off x="777240" y="1673352"/>
-            <a:ext cx="10424160" cy="2468879"/>
+            <a:off x="777240" y="1463040"/>
+            <a:ext cx="10424160" cy="4782312"/>
           </a:xfrm>
           <a:prstGeom prst="rect">
             <a:avLst/>
@@ -7323,9 +7786,9 @@
                 <a:spcPct val="115000"/>
               </a:lnSpc>
               <a:spcAft>
-                <a:spcPts val="500"/>
+                <a:spcPts val="800"/>
               </a:spcAft>
-              <a:defRPr sz="1500" b="0">
+              <a:defRPr sz="1900" b="0">
                 <a:solidFill>
                   <a:srgbClr val="37474F"/>
                 </a:solidFill>
@@ -7333,7 +7796,7 @@
               </a:defRPr>
             </a:pPr>
             <a:r>
-              <a:t>▸  Ch.19 Federated Learning on edge boards → Module G: Flower + 3 LR clients</a:t>
+              <a:t>▸  Ch.14 · HelloName sync Plugin Call + optional Docker lifecycle + fleet preview</a:t>
             </a:r>
           </a:p>
           <a:p>
@@ -7342,9 +7805,9 @@
                 <a:spcPct val="115000"/>
               </a:lnSpc>
               <a:spcAft>
-                <a:spcPts val="500"/>
+                <a:spcPts val="800"/>
               </a:spcAft>
-              <a:defRPr sz="1500" b="0">
+              <a:defRPr sz="1900" b="0">
                 <a:solidFill>
                   <a:srgbClr val="37474F"/>
                 </a:solidFill>
@@ -7352,7 +7815,7 @@
               </a:defRPr>
             </a:pPr>
             <a:r>
-              <a:t>▸  Ch.11 SLICES Blueprint + Crossplane + K3s → Module H: declarative IoT GitOps</a:t>
+              <a:t>▸  Deck: ModuleB_Plugin_Services_EN.pptx</a:t>
             </a:r>
           </a:p>
           <a:p>
@@ -7361,9 +7824,9 @@
                 <a:spcPct val="115000"/>
               </a:lnSpc>
               <a:spcAft>
-                <a:spcPts val="500"/>
+                <a:spcPts val="800"/>
               </a:spcAft>
-              <a:defRPr sz="1500" b="0">
+              <a:defRPr sz="1900" b="0">
                 <a:solidFill>
                   <a:srgbClr val="37474F"/>
                 </a:solidFill>
@@ -7371,71 +7834,14 @@
               </a:defRPr>
             </a:pPr>
             <a:r>
-              <a:t>▸  Ch.7 FaaS / Deviceless paradigm → Module I: sync vs async plugin contrast</a:t>
-            </a:r>
-          </a:p>
-          <a:p>
-            <a:pPr>
-              <a:lnSpc>
-                <a:spcPct val="115000"/>
-              </a:lnSpc>
-              <a:spcAft>
-                <a:spcPts val="500"/>
-              </a:spcAft>
-              <a:defRPr sz="1500" b="0">
-                <a:solidFill>
-                  <a:srgbClr val="37474F"/>
-                </a:solidFill>
-                <a:latin typeface="Calibri"/>
-              </a:defRPr>
-            </a:pPr>
-            <a:r>
-              <a:t>▸  Advanced tier: theory-heavy; Module H benefits from a pre-provisioned K3s cluster.</a:t>
-            </a:r>
-          </a:p>
-          <a:p>
-            <a:pPr>
-              <a:lnSpc>
-                <a:spcPct val="115000"/>
-              </a:lnSpc>
-              <a:spcAft>
-                <a:spcPts val="500"/>
-              </a:spcAft>
-              <a:defRPr sz="1500" b="0">
-                <a:solidFill>
-                  <a:srgbClr val="37474F"/>
-                </a:solidFill>
-                <a:latin typeface="Calibri"/>
-              </a:defRPr>
-            </a:pPr>
-            <a:r>
-              <a:t>▸  Module G needs Module D complete (3 Active boards on :1474/:1475/:1476)</a:t>
-            </a:r>
-          </a:p>
-          <a:p>
-            <a:pPr>
-              <a:lnSpc>
-                <a:spcPct val="115000"/>
-              </a:lnSpc>
-              <a:spcAft>
-                <a:spcPts val="500"/>
-              </a:spcAft>
-              <a:defRPr sz="1500" b="0">
-                <a:solidFill>
-                  <a:srgbClr val="37474F"/>
-                </a:solidFill>
-                <a:latin typeface="Calibri"/>
-              </a:defRPr>
-            </a:pPr>
-            <a:r>
-              <a:t>▸  Module H K3s install should run overnight — do NOT concurrent with Module G</a:t>
-            </a:r>
-          </a:p>
-        </p:txBody>
-      </p:sp>
-      <p:sp>
-        <p:nvSpPr>
-          <p:cNvPr id="8" name="Rectangle 7"/>
+              <a:t>▸  Builds on Module A — board must be Active before inject</a:t>
+            </a:r>
+          </a:p>
+        </p:txBody>
+      </p:sp>
+      <p:sp>
+        <p:nvSpPr>
+          <p:cNvPr id="6" name="Rectangle 5"/>
           <p:cNvSpPr/>
           <p:nvPr/>
         </p:nvSpPr>
@@ -7478,7 +7884,7 @@
       </p:sp>
       <p:sp>
         <p:nvSpPr>
-          <p:cNvPr id="9" name="TextBox 8"/>
+          <p:cNvPr id="7" name="TextBox 6"/>
           <p:cNvSpPr txBox="1"/>
           <p:nvPr/>
         </p:nvSpPr>
@@ -7508,42 +7914,6 @@
             </a:pPr>
             <a:r>
               <a:t>Assembling Smart CPS · Stack4Things Training</a:t>
-            </a:r>
-          </a:p>
-        </p:txBody>
-      </p:sp>
-      <p:sp>
-        <p:nvSpPr>
-          <p:cNvPr id="10" name="TextBox 9"/>
-          <p:cNvSpPr txBox="1"/>
-          <p:nvPr/>
-        </p:nvSpPr>
-        <p:spPr>
-          <a:xfrm>
-            <a:off x="9326880" y="6455664"/>
-            <a:ext cx="2377440" cy="320040"/>
-          </a:xfrm>
-          <a:prstGeom prst="rect">
-            <a:avLst/>
-          </a:prstGeom>
-          <a:noFill/>
-        </p:spPr>
-        <p:txBody>
-          <a:bodyPr wrap="none">
-            <a:spAutoFit/>
-          </a:bodyPr>
-          <a:lstStyle/>
-          <a:p>
-            <a:pPr algn="r">
-              <a:defRPr sz="900" b="1">
-                <a:solidFill>
-                  <a:srgbClr val="008B9A"/>
-                </a:solidFill>
-                <a:latin typeface="Calibri"/>
-              </a:defRPr>
-            </a:pPr>
-            <a:r>
-              <a:t>Theory</a:t>
             </a:r>
           </a:p>
         </p:txBody>
@@ -7640,7 +8010,7 @@
           <a:lstStyle/>
           <a:p>
             <a:pPr>
-              <a:defRPr sz="2800" b="1">
+              <a:defRPr sz="3000" b="1">
                 <a:solidFill>
                   <a:srgbClr val="0D2B45"/>
                 </a:solidFill>
@@ -7648,7 +8018,7 @@
               </a:defRPr>
             </a:pPr>
             <a:r>
-              <a:t>Module A — Deploy I/Ocloud (CORE, 60 min)</a:t>
+              <a:t>Module C — Environmental IoT Computation</a:t>
             </a:r>
           </a:p>
         </p:txBody>
@@ -7662,7 +8032,7 @@
         <p:spPr>
           <a:xfrm>
             <a:off x="502920" y="1344168"/>
-            <a:ext cx="11155680" cy="1691639"/>
+            <a:ext cx="11155680" cy="5010912"/>
           </a:xfrm>
           <a:prstGeom prst="roundRect">
             <a:avLst/>
@@ -7707,7 +8077,7 @@
         <p:spPr>
           <a:xfrm>
             <a:off x="777240" y="1463040"/>
-            <a:ext cx="10424160" cy="1508759"/>
+            <a:ext cx="10424160" cy="4782312"/>
           </a:xfrm>
           <a:prstGeom prst="rect">
             <a:avLst/>
@@ -7727,7 +8097,7 @@
               <a:spcAft>
                 <a:spcPts val="800"/>
               </a:spcAft>
-              <a:defRPr sz="1700" b="0">
+              <a:defRPr sz="1900" b="0">
                 <a:solidFill>
                   <a:srgbClr val="37474F"/>
                 </a:solidFill>
@@ -7735,7 +8105,7 @@
               </a:defRPr>
             </a:pPr>
             <a:r>
-              <a:t>▸  Ch.13 + Ch.4 · Docker Compose + board onboarding → Active board in Horizon</a:t>
+              <a:t>▸  Ch.15 · Async environmental_data publisher → InfluxDB · TOO(L)SMART wrap-up</a:t>
             </a:r>
           </a:p>
           <a:p>
@@ -7746,7 +8116,7 @@
               <a:spcAft>
                 <a:spcPts val="800"/>
               </a:spcAft>
-              <a:defRPr sz="1700" b="0">
+              <a:defRPr sz="1900" b="0">
                 <a:solidFill>
                   <a:srgbClr val="37474F"/>
                 </a:solidFill>
@@ -7754,7 +8124,7 @@
               </a:defRPr>
             </a:pPr>
             <a:r>
-              <a:t>▸  Deck: ModuleA_Deploy_IOcloud_EN.pptx</a:t>
+              <a:t>▸  Deck: ModuleC_IoT_Computation_EN.pptx</a:t>
             </a:r>
           </a:p>
           <a:p>
@@ -7765,7 +8135,7 @@
               <a:spcAft>
                 <a:spcPts val="800"/>
               </a:spcAft>
-              <a:defRPr sz="1700" b="0">
+              <a:defRPr sz="1900" b="0">
                 <a:solidFill>
                   <a:srgbClr val="37474F"/>
                 </a:solidFill>
@@ -7773,7 +8143,7 @@
               </a:defRPr>
             </a:pPr>
             <a:r>
-              <a:t>▸  Validate: ./training/validate-lab.sh (18 core checks)</a:t>
+              <a:t>▸  Contrasts with Module B sync plugin — continuous PaaS-style service</a:t>
             </a:r>
           </a:p>
         </p:txBody>
@@ -7949,7 +8319,7 @@
           <a:lstStyle/>
           <a:p>
             <a:pPr>
-              <a:defRPr sz="2800" b="1">
+              <a:defRPr sz="3000" b="1">
                 <a:solidFill>
                   <a:srgbClr val="0D2B45"/>
                 </a:solidFill>
@@ -7957,7 +8327,7 @@
               </a:defRPr>
             </a:pPr>
             <a:r>
-              <a:t>Module B — Plugins &amp; Services (CORE, 60 min)</a:t>
+              <a:t>Module D — Multi-board &amp; Fleet</a:t>
             </a:r>
           </a:p>
         </p:txBody>
@@ -7971,7 +8341,7 @@
         <p:spPr>
           <a:xfrm>
             <a:off x="502920" y="1344168"/>
-            <a:ext cx="11155680" cy="1691639"/>
+            <a:ext cx="11155680" cy="5010912"/>
           </a:xfrm>
           <a:prstGeom prst="roundRect">
             <a:avLst/>
@@ -8016,7 +8386,7 @@
         <p:spPr>
           <a:xfrm>
             <a:off x="777240" y="1463040"/>
-            <a:ext cx="10424160" cy="1508759"/>
+            <a:ext cx="10424160" cy="4782312"/>
           </a:xfrm>
           <a:prstGeom prst="rect">
             <a:avLst/>
@@ -8036,7 +8406,7 @@
               <a:spcAft>
                 <a:spcPts val="800"/>
               </a:spcAft>
-              <a:defRPr sz="1700" b="0">
+              <a:defRPr sz="1900" b="0">
                 <a:solidFill>
                   <a:srgbClr val="37474F"/>
                 </a:solidFill>
@@ -8044,7 +8414,7 @@
               </a:defRPr>
             </a:pPr>
             <a:r>
-              <a:t>▸  Ch.14 · HelloName sync Plugin Call + optional Docker lifecycle + fleet preview</a:t>
+              <a:t>▸  Ch.13–14 · 3 LR instances :1474/1475/1476 · fleet inject HelloName</a:t>
             </a:r>
           </a:p>
           <a:p>
@@ -8055,7 +8425,7 @@
               <a:spcAft>
                 <a:spcPts val="800"/>
               </a:spcAft>
-              <a:defRPr sz="1700" b="0">
+              <a:defRPr sz="1900" b="0">
                 <a:solidFill>
                   <a:srgbClr val="37474F"/>
                 </a:solidFill>
@@ -8063,7 +8433,7 @@
               </a:defRPr>
             </a:pPr>
             <a:r>
-              <a:t>▸  Deck: ModuleB_Plugin_Services_EN.pptx</a:t>
+              <a:t>▸  Deck: ModuleD_MultiBoard_EN.pptx</a:t>
             </a:r>
           </a:p>
           <a:p>
@@ -8074,7 +8444,7 @@
               <a:spcAft>
                 <a:spcPts val="800"/>
               </a:spcAft>
-              <a:defRPr sz="1700" b="0">
+              <a:defRPr sz="1900" b="0">
                 <a:solidFill>
                   <a:srgbClr val="37474F"/>
                 </a:solidFill>
@@ -8082,7 +8452,7 @@
               </a:defRPr>
             </a:pPr>
             <a:r>
-              <a:t>▸  Builds on Module A — board must be Active before inject</a:t>
+              <a:t>▸  Prerequisite for Module G (Federated Learning needs 3 clients)</a:t>
             </a:r>
           </a:p>
         </p:txBody>
@@ -8258,7 +8628,7 @@
           <a:lstStyle/>
           <a:p>
             <a:pPr>
-              <a:defRPr sz="2800" b="1">
+              <a:defRPr sz="3000" b="1">
                 <a:solidFill>
                   <a:srgbClr val="0D2B45"/>
                 </a:solidFill>
@@ -8266,7 +8636,7 @@
               </a:defRPr>
             </a:pPr>
             <a:r>
-              <a:t>Module C — Environmental IoT Computation (CORE, 60 min)</a:t>
+              <a:t>Module E — Virtual Networking</a:t>
             </a:r>
           </a:p>
         </p:txBody>
@@ -8280,7 +8650,7 @@
         <p:spPr>
           <a:xfrm>
             <a:off x="502920" y="1344168"/>
-            <a:ext cx="11155680" cy="1691639"/>
+            <a:ext cx="11155680" cy="5010912"/>
           </a:xfrm>
           <a:prstGeom prst="roundRect">
             <a:avLst/>
@@ -8325,7 +8695,7 @@
         <p:spPr>
           <a:xfrm>
             <a:off x="777240" y="1463040"/>
-            <a:ext cx="10424160" cy="1508759"/>
+            <a:ext cx="10424160" cy="4782312"/>
           </a:xfrm>
           <a:prstGeom prst="rect">
             <a:avLst/>
@@ -8345,7 +8715,7 @@
               <a:spcAft>
                 <a:spcPts val="800"/>
               </a:spcAft>
-              <a:defRPr sz="1700" b="0">
+              <a:defRPr sz="1900" b="0">
                 <a:solidFill>
                   <a:srgbClr val="37474F"/>
                 </a:solidFill>
@@ -8353,7 +8723,7 @@
               </a:defRPr>
             </a:pPr>
             <a:r>
-              <a:t>▸  Ch.15 · Async environmental_data publisher → InfluxDB · TOO(L)SMART wrap-up</a:t>
+              <a:t>▸  Ch.5 attach-port · IoTronic ports API · WAgent orchestration</a:t>
             </a:r>
           </a:p>
           <a:p>
@@ -8364,7 +8734,7 @@
               <a:spcAft>
                 <a:spcPts val="800"/>
               </a:spcAft>
-              <a:defRPr sz="1700" b="0">
+              <a:defRPr sz="1900" b="0">
                 <a:solidFill>
                   <a:srgbClr val="37474F"/>
                 </a:solidFill>
@@ -8372,7 +8742,7 @@
               </a:defRPr>
             </a:pPr>
             <a:r>
-              <a:t>▸  Deck: ModuleC_IoT_Computation_EN.pptx</a:t>
+              <a:t>▸  Deck: ModuleE_VirtualNetworking_EN.pptx</a:t>
             </a:r>
           </a:p>
           <a:p>
@@ -8383,7 +8753,7 @@
               <a:spcAft>
                 <a:spcPts val="800"/>
               </a:spcAft>
-              <a:defRPr sz="1700" b="0">
+              <a:defRPr sz="1900" b="0">
                 <a:solidFill>
                   <a:srgbClr val="37474F"/>
                 </a:solidFill>
@@ -8391,7 +8761,7 @@
               </a:defRPr>
             </a:pPr>
             <a:r>
-              <a:t>▸  Contrasts with Module B sync plugin — continuous PaaS-style service</a:t>
+              <a:t>▸  Skip if short on time or Neutron L3 incomplete in Docker lab</a:t>
             </a:r>
           </a:p>
         </p:txBody>
@@ -8567,7 +8937,7 @@
           <a:lstStyle/>
           <a:p>
             <a:pPr>
-              <a:defRPr sz="2800" b="1">
+              <a:defRPr sz="3000" b="1">
                 <a:solidFill>
                   <a:srgbClr val="0D2B45"/>
                 </a:solidFill>
@@ -8575,7 +8945,7 @@
               </a:defRPr>
             </a:pPr>
             <a:r>
-              <a:t>Module D — Multi-board &amp; Fleet (EXT, +45–60 min)</a:t>
+              <a:t>Module F — Web Services, WSTUN &amp; WoT</a:t>
             </a:r>
           </a:p>
         </p:txBody>
@@ -8589,7 +8959,7 @@
         <p:spPr>
           <a:xfrm>
             <a:off x="502920" y="1344168"/>
-            <a:ext cx="11155680" cy="1691639"/>
+            <a:ext cx="11155680" cy="5010912"/>
           </a:xfrm>
           <a:prstGeom prst="roundRect">
             <a:avLst/>
@@ -8634,7 +9004,7 @@
         <p:spPr>
           <a:xfrm>
             <a:off x="777240" y="1463040"/>
-            <a:ext cx="10424160" cy="1508759"/>
+            <a:ext cx="10424160" cy="4782312"/>
           </a:xfrm>
           <a:prstGeom prst="rect">
             <a:avLst/>
@@ -8654,7 +9024,7 @@
               <a:spcAft>
                 <a:spcPts val="800"/>
               </a:spcAft>
-              <a:defRPr sz="1700" b="0">
+              <a:defRPr sz="1900" b="0">
                 <a:solidFill>
                   <a:srgbClr val="37474F"/>
                 </a:solidFill>
@@ -8662,7 +9032,7 @@
               </a:defRPr>
             </a:pPr>
             <a:r>
-              <a:t>▸  Ch.13–14 · 3 LR instances :1474/1475/1476 · fleet inject HelloName</a:t>
+              <a:t>▸  Ch.6 + Ch.14 · WSTUN tunnel · Designate optional · book weather vs lab nginx</a:t>
             </a:r>
           </a:p>
           <a:p>
@@ -8673,7 +9043,7 @@
               <a:spcAft>
                 <a:spcPts val="800"/>
               </a:spcAft>
-              <a:defRPr sz="1700" b="0">
+              <a:defRPr sz="1900" b="0">
                 <a:solidFill>
                   <a:srgbClr val="37474F"/>
                 </a:solidFill>
@@ -8681,7 +9051,7 @@
               </a:defRPr>
             </a:pPr>
             <a:r>
-              <a:t>▸  Deck: ModuleD_MultiBoard_EN.pptx</a:t>
+              <a:t>▸  Deck: ModuleF_WebServices_WoT_EN.pptx</a:t>
             </a:r>
           </a:p>
           <a:p>
@@ -8692,7 +9062,7 @@
               <a:spcAft>
                 <a:spcPts val="800"/>
               </a:spcAft>
-              <a:defRPr sz="1700" b="0">
+              <a:defRPr sz="1900" b="0">
                 <a:solidFill>
                   <a:srgbClr val="37474F"/>
                 </a:solidFill>
@@ -8700,7 +9070,7 @@
               </a:defRPr>
             </a:pPr>
             <a:r>
-              <a:t>▸  Prerequisite for Module G (Federated Learning needs 3 clients)</a:t>
+              <a:t>▸  Validate: ./training/validate-lab-wstun.sh</a:t>
             </a:r>
           </a:p>
         </p:txBody>
@@ -8876,7 +9246,7 @@
           <a:lstStyle/>
           <a:p>
             <a:pPr>
-              <a:defRPr sz="2800" b="1">
+              <a:defRPr sz="3000" b="1">
                 <a:solidFill>
                   <a:srgbClr val="0D2B45"/>
                 </a:solidFill>
@@ -8884,7 +9254,7 @@
               </a:defRPr>
             </a:pPr>
             <a:r>
-              <a:t>Module E — Virtual Networking (EXT, +45–60 min, OPTIONAL)</a:t>
+              <a:t>Module G — Federated Learning</a:t>
             </a:r>
           </a:p>
         </p:txBody>
@@ -8898,7 +9268,7 @@
         <p:spPr>
           <a:xfrm>
             <a:off x="502920" y="1344168"/>
-            <a:ext cx="11155680" cy="1691639"/>
+            <a:ext cx="11155680" cy="5010912"/>
           </a:xfrm>
           <a:prstGeom prst="roundRect">
             <a:avLst/>
@@ -8943,7 +9313,7 @@
         <p:spPr>
           <a:xfrm>
             <a:off x="777240" y="1463040"/>
-            <a:ext cx="10424160" cy="1508759"/>
+            <a:ext cx="10424160" cy="4782312"/>
           </a:xfrm>
           <a:prstGeom prst="rect">
             <a:avLst/>
@@ -8963,7 +9333,7 @@
               <a:spcAft>
                 <a:spcPts val="800"/>
               </a:spcAft>
-              <a:defRPr sz="1700" b="0">
+              <a:defRPr sz="1900" b="0">
                 <a:solidFill>
                   <a:srgbClr val="37474F"/>
                 </a:solidFill>
@@ -8971,7 +9341,7 @@
               </a:defRPr>
             </a:pPr>
             <a:r>
-              <a:t>▸  Ch.5 attach-port · IoTronic ports API · WAgent orchestration</a:t>
+              <a:t>▸  Ch.19 · Flower server · 3 edge clients · requires Module D complete</a:t>
             </a:r>
           </a:p>
           <a:p>
@@ -8982,7 +9352,7 @@
               <a:spcAft>
                 <a:spcPts val="800"/>
               </a:spcAft>
-              <a:defRPr sz="1700" b="0">
+              <a:defRPr sz="1900" b="0">
                 <a:solidFill>
                   <a:srgbClr val="37474F"/>
                 </a:solidFill>
@@ -8990,7 +9360,7 @@
               </a:defRPr>
             </a:pPr>
             <a:r>
-              <a:t>▸  Deck: ModuleE_VirtualNetworking_EN.pptx</a:t>
+              <a:t>▸  Deck: ModuleG_FederatedLearning_EN.pptx</a:t>
             </a:r>
           </a:p>
           <a:p>
@@ -9001,7 +9371,7 @@
               <a:spcAft>
                 <a:spcPts val="800"/>
               </a:spcAft>
-              <a:defRPr sz="1700" b="0">
+              <a:defRPr sz="1900" b="0">
                 <a:solidFill>
                   <a:srgbClr val="37474F"/>
                 </a:solidFill>
@@ -9009,7 +9379,7 @@
               </a:defRPr>
             </a:pPr>
             <a:r>
-              <a:t>▸  Skip if short on time or Neutron L3 incomplete in Docker lab</a:t>
+              <a:t>▸  Do NOT run simultaneously with Module H (K3s RAM gate)</a:t>
             </a:r>
           </a:p>
         </p:txBody>
@@ -9185,7 +9555,7 @@
           <a:lstStyle/>
           <a:p>
             <a:pPr algn="ctr">
-              <a:defRPr sz="3600" b="1">
+              <a:defRPr sz="3800" b="1">
                 <a:solidFill>
                   <a:srgbClr val="FFFFFF"/>
                 </a:solidFill>
@@ -9221,7 +9591,7 @@
           <a:lstStyle/>
           <a:p>
             <a:pPr algn="ctr">
-              <a:defRPr sz="2000" b="0">
+              <a:defRPr sz="2200" b="0">
                 <a:solidFill>
                   <a:srgbClr val="B2EBF2"/>
                 </a:solidFill>
@@ -9326,7 +9696,7 @@
           <a:lstStyle/>
           <a:p>
             <a:pPr>
-              <a:defRPr sz="2800" b="1">
+              <a:defRPr sz="3000" b="1">
                 <a:solidFill>
                   <a:srgbClr val="0D2B45"/>
                 </a:solidFill>
@@ -9334,7 +9704,7 @@
               </a:defRPr>
             </a:pPr>
             <a:r>
-              <a:t>Module F — Web Services, WSTUN &amp; WoT (EXT, +30–45 min)</a:t>
+              <a:t>Module H — SLICES Blueprint &amp; K3s</a:t>
             </a:r>
           </a:p>
         </p:txBody>
@@ -9348,7 +9718,7 @@
         <p:spPr>
           <a:xfrm>
             <a:off x="502920" y="1344168"/>
-            <a:ext cx="11155680" cy="1691639"/>
+            <a:ext cx="11155680" cy="5010912"/>
           </a:xfrm>
           <a:prstGeom prst="roundRect">
             <a:avLst/>
@@ -9393,7 +9763,7 @@
         <p:spPr>
           <a:xfrm>
             <a:off x="777240" y="1463040"/>
-            <a:ext cx="10424160" cy="1508759"/>
+            <a:ext cx="10424160" cy="4782312"/>
           </a:xfrm>
           <a:prstGeom prst="rect">
             <a:avLst/>
@@ -9413,7 +9783,7 @@
               <a:spcAft>
                 <a:spcPts val="800"/>
               </a:spcAft>
-              <a:defRPr sz="1700" b="0">
+              <a:defRPr sz="1900" b="0">
                 <a:solidFill>
                   <a:srgbClr val="37474F"/>
                 </a:solidFill>
@@ -9421,7 +9791,7 @@
               </a:defRPr>
             </a:pPr>
             <a:r>
-              <a:t>▸  Ch.6 + Ch.14 · WSTUN tunnel · Designate optional · book weather vs lab nginx</a:t>
+              <a:t>▸  Ch.11 · Crossplane provider + K3s deploy · GitOps for IoT fleets</a:t>
             </a:r>
           </a:p>
           <a:p>
@@ -9432,7 +9802,7 @@
               <a:spcAft>
                 <a:spcPts val="800"/>
               </a:spcAft>
-              <a:defRPr sz="1700" b="0">
+              <a:defRPr sz="1900" b="0">
                 <a:solidFill>
                   <a:srgbClr val="37474F"/>
                 </a:solidFill>
@@ -9440,7 +9810,7 @@
               </a:defRPr>
             </a:pPr>
             <a:r>
-              <a:t>▸  Deck: ModuleF_WebServices_WoT_EN.pptx</a:t>
+              <a:t>▸  Deck: ModuleH_Blueprint_K3s_EN.pptx</a:t>
             </a:r>
           </a:p>
           <a:p>
@@ -9451,7 +9821,7 @@
               <a:spcAft>
                 <a:spcPts val="800"/>
               </a:spcAft>
-              <a:defRPr sz="1700" b="0">
+              <a:defRPr sz="1900" b="0">
                 <a:solidFill>
                   <a:srgbClr val="37474F"/>
                 </a:solidFill>
@@ -9459,7 +9829,7 @@
               </a:defRPr>
             </a:pPr>
             <a:r>
-              <a:t>▸  Validate: ./training/validate-lab-wstun.sh</a:t>
+              <a:t>▸  K3s cluster should be installed before the session on a dedicated VM.</a:t>
             </a:r>
           </a:p>
         </p:txBody>
@@ -9635,7 +10005,7 @@
           <a:lstStyle/>
           <a:p>
             <a:pPr>
-              <a:defRPr sz="2800" b="1">
+              <a:defRPr sz="3000" b="1">
                 <a:solidFill>
                   <a:srgbClr val="0D2B45"/>
                 </a:solidFill>
@@ -9643,7 +10013,7 @@
               </a:defRPr>
             </a:pPr>
             <a:r>
-              <a:t>Module G — Federated Learning (ADV, +60–90 min)</a:t>
+              <a:t>Module I — FaaS &amp; Deviceless</a:t>
             </a:r>
           </a:p>
         </p:txBody>
@@ -9657,7 +10027,7 @@
         <p:spPr>
           <a:xfrm>
             <a:off x="502920" y="1344168"/>
-            <a:ext cx="11155680" cy="1691639"/>
+            <a:ext cx="11155680" cy="5010912"/>
           </a:xfrm>
           <a:prstGeom prst="roundRect">
             <a:avLst/>
@@ -9702,7 +10072,7 @@
         <p:spPr>
           <a:xfrm>
             <a:off x="777240" y="1463040"/>
-            <a:ext cx="10424160" cy="1508759"/>
+            <a:ext cx="10424160" cy="4782312"/>
           </a:xfrm>
           <a:prstGeom prst="rect">
             <a:avLst/>
@@ -9722,7 +10092,7 @@
               <a:spcAft>
                 <a:spcPts val="800"/>
               </a:spcAft>
-              <a:defRPr sz="1700" b="0">
+              <a:defRPr sz="1900" b="0">
                 <a:solidFill>
                   <a:srgbClr val="37474F"/>
                 </a:solidFill>
@@ -9730,7 +10100,7 @@
               </a:defRPr>
             </a:pPr>
             <a:r>
-              <a:t>▸  Ch.19 · Flower server · 3 edge clients · requires Module D complete</a:t>
+              <a:t>▸  Ch.7 theory · sync HelloName vs async environmental on same LR</a:t>
             </a:r>
           </a:p>
           <a:p>
@@ -9741,7 +10111,7 @@
               <a:spcAft>
                 <a:spcPts val="800"/>
               </a:spcAft>
-              <a:defRPr sz="1700" b="0">
+              <a:defRPr sz="1900" b="0">
                 <a:solidFill>
                   <a:srgbClr val="37474F"/>
                 </a:solidFill>
@@ -9749,7 +10119,7 @@
               </a:defRPr>
             </a:pPr>
             <a:r>
-              <a:t>▸  Deck: ModuleG_FederatedLearning_EN.pptx</a:t>
+              <a:t>▸  Deck: ModuleI_FaaS_Deviceless_EN.pptx</a:t>
             </a:r>
           </a:p>
           <a:p>
@@ -9760,7 +10130,7 @@
               <a:spcAft>
                 <a:spcPts val="800"/>
               </a:spcAft>
-              <a:defRPr sz="1700" b="0">
+              <a:defRPr sz="1900" b="0">
                 <a:solidFill>
                   <a:srgbClr val="37474F"/>
                 </a:solidFill>
@@ -9768,7 +10138,7 @@
               </a:defRPr>
             </a:pPr>
             <a:r>
-              <a:t>▸  Do NOT run simultaneously with Module H (K3s RAM gate)</a:t>
+              <a:t>▸  No new infrastructure — conceptual bridge across Modules B, C, F</a:t>
             </a:r>
           </a:p>
         </p:txBody>
@@ -9944,7 +10314,7 @@
           <a:lstStyle/>
           <a:p>
             <a:pPr>
-              <a:defRPr sz="2800" b="1">
+              <a:defRPr sz="3000" b="1">
                 <a:solidFill>
                   <a:srgbClr val="0D2B45"/>
                 </a:solidFill>
@@ -9952,7 +10322,7 @@
               </a:defRPr>
             </a:pPr>
             <a:r>
-              <a:t>Module H — SLICES Blueprint &amp; K3s (ADV, +45–60 min)</a:t>
+              <a:t>Validation scripts &amp; lab hygiene</a:t>
             </a:r>
           </a:p>
         </p:txBody>
@@ -9966,7 +10336,7 @@
         <p:spPr>
           <a:xfrm>
             <a:off x="502920" y="1344168"/>
-            <a:ext cx="11155680" cy="1691639"/>
+            <a:ext cx="11155680" cy="5010912"/>
           </a:xfrm>
           <a:prstGeom prst="roundRect">
             <a:avLst/>
@@ -10011,7 +10381,7 @@
         <p:spPr>
           <a:xfrm>
             <a:off x="777240" y="1463040"/>
-            <a:ext cx="10424160" cy="1508759"/>
+            <a:ext cx="10424160" cy="4782312"/>
           </a:xfrm>
           <a:prstGeom prst="rect">
             <a:avLst/>
@@ -10031,7 +10401,7 @@
               <a:spcAft>
                 <a:spcPts val="800"/>
               </a:spcAft>
-              <a:defRPr sz="1700" b="0">
+              <a:defRPr sz="1900" b="0">
                 <a:solidFill>
                   <a:srgbClr val="37474F"/>
                 </a:solidFill>
@@ -10039,7 +10409,7 @@
               </a:defRPr>
             </a:pPr>
             <a:r>
-              <a:t>▸  Ch.11 · Crossplane provider + K3s deploy · GitOps for IoT fleets</a:t>
+              <a:t>▸  ./training/validate-lab.sh — core 18 checks after Module A–C</a:t>
             </a:r>
           </a:p>
           <a:p>
@@ -10050,7 +10420,7 @@
               <a:spcAft>
                 <a:spcPts val="800"/>
               </a:spcAft>
-              <a:defRPr sz="1700" b="0">
+              <a:defRPr sz="1900" b="0">
                 <a:solidFill>
                   <a:srgbClr val="37474F"/>
                 </a:solidFill>
@@ -10058,7 +10428,7 @@
               </a:defRPr>
             </a:pPr>
             <a:r>
-              <a:t>▸  Deck: ModuleH_Blueprint_K3s_EN.pptx</a:t>
+              <a:t>▸  ./training/validate-lab-multiboard.sh · validate-lab-vn.sh</a:t>
             </a:r>
           </a:p>
           <a:p>
@@ -10069,7 +10439,7 @@
               <a:spcAft>
                 <a:spcPts val="800"/>
               </a:spcAft>
-              <a:defRPr sz="1700" b="0">
+              <a:defRPr sz="1900" b="0">
                 <a:solidFill>
                   <a:srgbClr val="37474F"/>
                 </a:solidFill>
@@ -10077,7 +10447,26 @@
               </a:defRPr>
             </a:pPr>
             <a:r>
-              <a:t>▸  K3s cluster should be installed before the session on a dedicated VM.</a:t>
+              <a:t>▸  ./training/validate-lab-wstun.sh · validate-lab-fl.sh</a:t>
+            </a:r>
+          </a:p>
+          <a:p>
+            <a:pPr>
+              <a:lnSpc>
+                <a:spcPct val="115000"/>
+              </a:lnSpc>
+              <a:spcAft>
+                <a:spcPts val="800"/>
+              </a:spcAft>
+              <a:defRPr sz="1900" b="0">
+                <a:solidFill>
+                  <a:srgbClr val="37474F"/>
+                </a:solidFill>
+                <a:latin typeface="Calibri"/>
+              </a:defRPr>
+            </a:pPr>
+            <a:r>
+              <a:t>▸  Run relevant script before each module; fix failures before proceeding</a:t>
             </a:r>
           </a:p>
         </p:txBody>
@@ -10253,7 +10642,7 @@
           <a:lstStyle/>
           <a:p>
             <a:pPr>
-              <a:defRPr sz="2800" b="1">
+              <a:defRPr sz="3000" b="1">
                 <a:solidFill>
                   <a:srgbClr val="0D2B45"/>
                 </a:solidFill>
@@ -10261,7 +10650,7 @@
               </a:defRPr>
             </a:pPr>
             <a:r>
-              <a:t>Module I — FaaS &amp; Deviceless (ADV, +30–45 min)</a:t>
+              <a:t>Lab prerequisites</a:t>
             </a:r>
           </a:p>
         </p:txBody>
@@ -10275,7 +10664,7 @@
         <p:spPr>
           <a:xfrm>
             <a:off x="502920" y="1344168"/>
-            <a:ext cx="11155680" cy="1691639"/>
+            <a:ext cx="11155680" cy="5010912"/>
           </a:xfrm>
           <a:prstGeom prst="roundRect">
             <a:avLst/>
@@ -10320,7 +10709,7 @@
         <p:spPr>
           <a:xfrm>
             <a:off x="777240" y="1463040"/>
-            <a:ext cx="10424160" cy="1508759"/>
+            <a:ext cx="10424160" cy="4782312"/>
           </a:xfrm>
           <a:prstGeom prst="rect">
             <a:avLst/>
@@ -10340,7 +10729,7 @@
               <a:spcAft>
                 <a:spcPts val="800"/>
               </a:spcAft>
-              <a:defRPr sz="1700" b="0">
+              <a:defRPr sz="1900" b="0">
                 <a:solidFill>
                   <a:srgbClr val="37474F"/>
                 </a:solidFill>
@@ -10348,7 +10737,7 @@
               </a:defRPr>
             </a:pPr>
             <a:r>
-              <a:t>▸  Ch.7 theory · sync HelloName vs async environmental on same LR</a:t>
+              <a:t>▸  Docker and Docker Compose installed; user in the docker group.</a:t>
             </a:r>
           </a:p>
           <a:p>
@@ -10359,7 +10748,7 @@
               <a:spcAft>
                 <a:spcPts val="800"/>
               </a:spcAft>
-              <a:defRPr sz="1700" b="0">
+              <a:defRPr sz="1900" b="0">
                 <a:solidFill>
                   <a:srgbClr val="37474F"/>
                 </a:solidFill>
@@ -10367,7 +10756,7 @@
               </a:defRPr>
             </a:pPr>
             <a:r>
-              <a:t>▸  Deck: ModuleI_FaaS_Deviceless_EN.pptx</a:t>
+              <a:t>▸  Horizon: http://{{VM_IP}}/horizon — credentials admin / s4t.</a:t>
             </a:r>
           </a:p>
           <a:p>
@@ -10378,7 +10767,7 @@
               <a:spcAft>
                 <a:spcPts val="800"/>
               </a:spcAft>
-              <a:defRPr sz="1700" b="0">
+              <a:defRPr sz="1900" b="0">
                 <a:solidFill>
                   <a:srgbClr val="37474F"/>
                 </a:solidFill>
@@ -10386,261 +10775,9 @@
               </a:defRPr>
             </a:pPr>
             <a:r>
-              <a:t>▸  No new infrastructure — conceptual bridge across Modules B, C, F</a:t>
-            </a:r>
-          </a:p>
-        </p:txBody>
-      </p:sp>
-      <p:sp>
-        <p:nvSpPr>
-          <p:cNvPr id="6" name="Rectangle 5"/>
-          <p:cNvSpPr/>
-          <p:nvPr/>
-        </p:nvSpPr>
-        <p:spPr>
-          <a:xfrm>
-            <a:off x="457200" y="6446520"/>
-            <a:ext cx="11274552" cy="18288"/>
-          </a:xfrm>
-          <a:prstGeom prst="rect">
-            <a:avLst/>
-          </a:prstGeom>
-          <a:solidFill>
-            <a:srgbClr val="B2EBF2"/>
-          </a:solidFill>
-          <a:ln>
-            <a:noFill/>
-          </a:ln>
-        </p:spPr>
-        <p:style>
-          <a:lnRef idx="1">
-            <a:schemeClr val="accent1"/>
-          </a:lnRef>
-          <a:fillRef idx="3">
-            <a:schemeClr val="accent1"/>
-          </a:fillRef>
-          <a:effectRef idx="2">
-            <a:schemeClr val="accent1"/>
-          </a:effectRef>
-          <a:fontRef idx="minor">
-            <a:schemeClr val="lt1"/>
-          </a:fontRef>
-        </p:style>
-        <p:txBody>
-          <a:bodyPr rtlCol="0" anchor="ctr"/>
-          <a:lstStyle/>
-          <a:p>
-            <a:pPr algn="ctr"/>
-          </a:p>
-        </p:txBody>
-      </p:sp>
-      <p:sp>
-        <p:nvSpPr>
-          <p:cNvPr id="7" name="TextBox 6"/>
-          <p:cNvSpPr txBox="1"/>
-          <p:nvPr/>
-        </p:nvSpPr>
-        <p:spPr>
-          <a:xfrm>
-            <a:off x="502920" y="6473952"/>
-            <a:ext cx="7315200" cy="320040"/>
-          </a:xfrm>
-          <a:prstGeom prst="rect">
-            <a:avLst/>
-          </a:prstGeom>
-          <a:noFill/>
-        </p:spPr>
-        <p:txBody>
-          <a:bodyPr wrap="none">
-            <a:spAutoFit/>
-          </a:bodyPr>
-          <a:lstStyle/>
-          <a:p>
-            <a:pPr>
-              <a:defRPr sz="900" b="0">
-                <a:solidFill>
-                  <a:srgbClr val="90A4AE"/>
-                </a:solidFill>
-                <a:latin typeface="Calibri"/>
-              </a:defRPr>
-            </a:pPr>
-            <a:r>
-              <a:t>Assembling Smart CPS · Stack4Things Training</a:t>
-            </a:r>
-          </a:p>
-        </p:txBody>
-      </p:sp>
-    </p:spTree>
-  </p:cSld>
-  <p:clrMapOvr>
-    <a:masterClrMapping/>
-  </p:clrMapOvr>
-</p:sld>
-</file>
-
-<file path=ppt/slides/slide24.xml><?xml version="1.0" encoding="utf-8"?>
-<p:sld xmlns:a="http://schemas.openxmlformats.org/drawingml/2006/main" xmlns:p="http://schemas.openxmlformats.org/presentationml/2006/main" xmlns:r="http://schemas.openxmlformats.org/officeDocument/2006/relationships">
-  <p:cSld>
-    <p:bg>
-      <p:bgPr>
-        <a:solidFill>
-          <a:srgbClr val="F8FAFC"/>
-        </a:solidFill>
-        <a:effectLst/>
-      </p:bgPr>
-    </p:bg>
-    <p:spTree>
-      <p:nvGrpSpPr>
-        <p:cNvPr id="1" name=""/>
-        <p:cNvGrpSpPr/>
-        <p:nvPr/>
-      </p:nvGrpSpPr>
-      <p:grpSpPr/>
-      <p:sp>
-        <p:nvSpPr>
-          <p:cNvPr id="2" name="Rectangle 1"/>
-          <p:cNvSpPr/>
-          <p:nvPr/>
-        </p:nvSpPr>
-        <p:spPr>
-          <a:xfrm>
-            <a:off x="0" y="0"/>
-            <a:ext cx="12191695" cy="54864"/>
-          </a:xfrm>
-          <a:prstGeom prst="rect">
-            <a:avLst/>
-          </a:prstGeom>
-          <a:solidFill>
-            <a:srgbClr val="1A4A6E"/>
-          </a:solidFill>
-          <a:ln>
-            <a:noFill/>
-          </a:ln>
-        </p:spPr>
-        <p:style>
-          <a:lnRef idx="1">
-            <a:schemeClr val="accent1"/>
-          </a:lnRef>
-          <a:fillRef idx="3">
-            <a:schemeClr val="accent1"/>
-          </a:fillRef>
-          <a:effectRef idx="2">
-            <a:schemeClr val="accent1"/>
-          </a:effectRef>
-          <a:fontRef idx="minor">
-            <a:schemeClr val="lt1"/>
-          </a:fontRef>
-        </p:style>
-        <p:txBody>
-          <a:bodyPr rtlCol="0" anchor="ctr"/>
-          <a:lstStyle/>
-          <a:p>
-            <a:pPr algn="ctr"/>
-          </a:p>
-        </p:txBody>
-      </p:sp>
-      <p:sp>
-        <p:nvSpPr>
-          <p:cNvPr id="3" name="TextBox 2"/>
-          <p:cNvSpPr txBox="1"/>
-          <p:nvPr/>
-        </p:nvSpPr>
-        <p:spPr>
-          <a:xfrm>
-            <a:off x="594360" y="502920"/>
-            <a:ext cx="10972800" cy="868680"/>
-          </a:xfrm>
-          <a:prstGeom prst="rect">
-            <a:avLst/>
-          </a:prstGeom>
-          <a:noFill/>
-        </p:spPr>
-        <p:txBody>
-          <a:bodyPr wrap="none">
-            <a:spAutoFit/>
-          </a:bodyPr>
-          <a:lstStyle/>
-          <a:p>
-            <a:pPr>
-              <a:defRPr sz="2800" b="1">
-                <a:solidFill>
-                  <a:srgbClr val="0D2B45"/>
-                </a:solidFill>
-                <a:latin typeface="Calibri"/>
-              </a:defRPr>
-            </a:pPr>
-            <a:r>
-              <a:t>Validation scripts &amp; lab hygiene</a:t>
-            </a:r>
-          </a:p>
-        </p:txBody>
-      </p:sp>
-      <p:sp>
-        <p:nvSpPr>
-          <p:cNvPr id="4" name="Rounded Rectangle 3"/>
-          <p:cNvSpPr/>
-          <p:nvPr/>
-        </p:nvSpPr>
-        <p:spPr>
-          <a:xfrm>
-            <a:off x="502920" y="1344168"/>
-            <a:ext cx="11155680" cy="2011680"/>
-          </a:xfrm>
-          <a:prstGeom prst="roundRect">
-            <a:avLst/>
-          </a:prstGeom>
-          <a:solidFill>
-            <a:srgbClr val="FFFFFF"/>
-          </a:solidFill>
-          <a:ln w="9525">
-            <a:solidFill>
-              <a:srgbClr val="B2EBF2"/>
-            </a:solidFill>
-          </a:ln>
-        </p:spPr>
-        <p:style>
-          <a:lnRef idx="1">
-            <a:schemeClr val="accent1"/>
-          </a:lnRef>
-          <a:fillRef idx="3">
-            <a:schemeClr val="accent1"/>
-          </a:fillRef>
-          <a:effectRef idx="2">
-            <a:schemeClr val="accent1"/>
-          </a:effectRef>
-          <a:fontRef idx="minor">
-            <a:schemeClr val="lt1"/>
-          </a:fontRef>
-        </p:style>
-        <p:txBody>
-          <a:bodyPr rtlCol="0" anchor="ctr"/>
-          <a:lstStyle/>
-          <a:p>
-            <a:pPr algn="ctr"/>
-          </a:p>
-        </p:txBody>
-      </p:sp>
-      <p:sp>
-        <p:nvSpPr>
-          <p:cNvPr id="5" name="TextBox 4"/>
-          <p:cNvSpPr txBox="1"/>
-          <p:nvPr/>
-        </p:nvSpPr>
-        <p:spPr>
-          <a:xfrm>
-            <a:off x="777240" y="1463040"/>
-            <a:ext cx="10424160" cy="1828800"/>
-          </a:xfrm>
-          <a:prstGeom prst="rect">
-            <a:avLst/>
-          </a:prstGeom>
-          <a:noFill/>
-        </p:spPr>
-        <p:txBody>
-          <a:bodyPr wrap="square">
-            <a:spAutoFit/>
-          </a:bodyPr>
-          <a:lstStyle/>
+              <a:t>▸  Lightning-Rod UI: http://{{VM_IP}}:1474 — credentials me / arancino.</a:t>
+            </a:r>
+          </a:p>
           <a:p>
             <a:pPr>
               <a:lnSpc>
@@ -10649,392 +10786,7 @@
               <a:spcAft>
                 <a:spcPts val="800"/>
               </a:spcAft>
-              <a:defRPr sz="1700" b="0">
-                <a:solidFill>
-                  <a:srgbClr val="37474F"/>
-                </a:solidFill>
-                <a:latin typeface="Calibri"/>
-              </a:defRPr>
-            </a:pPr>
-            <a:r>
-              <a:t>▸  ./training/validate-lab.sh — core 18 checks after Module A–C</a:t>
-            </a:r>
-          </a:p>
-          <a:p>
-            <a:pPr>
-              <a:lnSpc>
-                <a:spcPct val="115000"/>
-              </a:lnSpc>
-              <a:spcAft>
-                <a:spcPts val="800"/>
-              </a:spcAft>
-              <a:defRPr sz="1700" b="0">
-                <a:solidFill>
-                  <a:srgbClr val="37474F"/>
-                </a:solidFill>
-                <a:latin typeface="Calibri"/>
-              </a:defRPr>
-            </a:pPr>
-            <a:r>
-              <a:t>▸  ./training/validate-lab-multiboard.sh · validate-lab-vn.sh</a:t>
-            </a:r>
-          </a:p>
-          <a:p>
-            <a:pPr>
-              <a:lnSpc>
-                <a:spcPct val="115000"/>
-              </a:lnSpc>
-              <a:spcAft>
-                <a:spcPts val="800"/>
-              </a:spcAft>
-              <a:defRPr sz="1700" b="0">
-                <a:solidFill>
-                  <a:srgbClr val="37474F"/>
-                </a:solidFill>
-                <a:latin typeface="Calibri"/>
-              </a:defRPr>
-            </a:pPr>
-            <a:r>
-              <a:t>▸  ./training/validate-lab-wstun.sh · validate-lab-fl.sh</a:t>
-            </a:r>
-          </a:p>
-          <a:p>
-            <a:pPr>
-              <a:lnSpc>
-                <a:spcPct val="115000"/>
-              </a:lnSpc>
-              <a:spcAft>
-                <a:spcPts val="800"/>
-              </a:spcAft>
-              <a:defRPr sz="1700" b="0">
-                <a:solidFill>
-                  <a:srgbClr val="37474F"/>
-                </a:solidFill>
-                <a:latin typeface="Calibri"/>
-              </a:defRPr>
-            </a:pPr>
-            <a:r>
-              <a:t>▸  Run relevant script before each module; fix failures before proceeding</a:t>
-            </a:r>
-          </a:p>
-        </p:txBody>
-      </p:sp>
-      <p:sp>
-        <p:nvSpPr>
-          <p:cNvPr id="6" name="Rectangle 5"/>
-          <p:cNvSpPr/>
-          <p:nvPr/>
-        </p:nvSpPr>
-        <p:spPr>
-          <a:xfrm>
-            <a:off x="457200" y="6446520"/>
-            <a:ext cx="11274552" cy="18288"/>
-          </a:xfrm>
-          <a:prstGeom prst="rect">
-            <a:avLst/>
-          </a:prstGeom>
-          <a:solidFill>
-            <a:srgbClr val="B2EBF2"/>
-          </a:solidFill>
-          <a:ln>
-            <a:noFill/>
-          </a:ln>
-        </p:spPr>
-        <p:style>
-          <a:lnRef idx="1">
-            <a:schemeClr val="accent1"/>
-          </a:lnRef>
-          <a:fillRef idx="3">
-            <a:schemeClr val="accent1"/>
-          </a:fillRef>
-          <a:effectRef idx="2">
-            <a:schemeClr val="accent1"/>
-          </a:effectRef>
-          <a:fontRef idx="minor">
-            <a:schemeClr val="lt1"/>
-          </a:fontRef>
-        </p:style>
-        <p:txBody>
-          <a:bodyPr rtlCol="0" anchor="ctr"/>
-          <a:lstStyle/>
-          <a:p>
-            <a:pPr algn="ctr"/>
-          </a:p>
-        </p:txBody>
-      </p:sp>
-      <p:sp>
-        <p:nvSpPr>
-          <p:cNvPr id="7" name="TextBox 6"/>
-          <p:cNvSpPr txBox="1"/>
-          <p:nvPr/>
-        </p:nvSpPr>
-        <p:spPr>
-          <a:xfrm>
-            <a:off x="502920" y="6473952"/>
-            <a:ext cx="7315200" cy="320040"/>
-          </a:xfrm>
-          <a:prstGeom prst="rect">
-            <a:avLst/>
-          </a:prstGeom>
-          <a:noFill/>
-        </p:spPr>
-        <p:txBody>
-          <a:bodyPr wrap="none">
-            <a:spAutoFit/>
-          </a:bodyPr>
-          <a:lstStyle/>
-          <a:p>
-            <a:pPr>
-              <a:defRPr sz="900" b="0">
-                <a:solidFill>
-                  <a:srgbClr val="90A4AE"/>
-                </a:solidFill>
-                <a:latin typeface="Calibri"/>
-              </a:defRPr>
-            </a:pPr>
-            <a:r>
-              <a:t>Assembling Smart CPS · Stack4Things Training</a:t>
-            </a:r>
-          </a:p>
-        </p:txBody>
-      </p:sp>
-    </p:spTree>
-  </p:cSld>
-  <p:clrMapOvr>
-    <a:masterClrMapping/>
-  </p:clrMapOvr>
-</p:sld>
-</file>
-
-<file path=ppt/slides/slide25.xml><?xml version="1.0" encoding="utf-8"?>
-<p:sld xmlns:a="http://schemas.openxmlformats.org/drawingml/2006/main" xmlns:p="http://schemas.openxmlformats.org/presentationml/2006/main" xmlns:r="http://schemas.openxmlformats.org/officeDocument/2006/relationships">
-  <p:cSld>
-    <p:bg>
-      <p:bgPr>
-        <a:solidFill>
-          <a:srgbClr val="F8FAFC"/>
-        </a:solidFill>
-        <a:effectLst/>
-      </p:bgPr>
-    </p:bg>
-    <p:spTree>
-      <p:nvGrpSpPr>
-        <p:cNvPr id="1" name=""/>
-        <p:cNvGrpSpPr/>
-        <p:nvPr/>
-      </p:nvGrpSpPr>
-      <p:grpSpPr/>
-      <p:sp>
-        <p:nvSpPr>
-          <p:cNvPr id="2" name="Rectangle 1"/>
-          <p:cNvSpPr/>
-          <p:nvPr/>
-        </p:nvSpPr>
-        <p:spPr>
-          <a:xfrm>
-            <a:off x="0" y="0"/>
-            <a:ext cx="12191695" cy="54864"/>
-          </a:xfrm>
-          <a:prstGeom prst="rect">
-            <a:avLst/>
-          </a:prstGeom>
-          <a:solidFill>
-            <a:srgbClr val="1A4A6E"/>
-          </a:solidFill>
-          <a:ln>
-            <a:noFill/>
-          </a:ln>
-        </p:spPr>
-        <p:style>
-          <a:lnRef idx="1">
-            <a:schemeClr val="accent1"/>
-          </a:lnRef>
-          <a:fillRef idx="3">
-            <a:schemeClr val="accent1"/>
-          </a:fillRef>
-          <a:effectRef idx="2">
-            <a:schemeClr val="accent1"/>
-          </a:effectRef>
-          <a:fontRef idx="minor">
-            <a:schemeClr val="lt1"/>
-          </a:fontRef>
-        </p:style>
-        <p:txBody>
-          <a:bodyPr rtlCol="0" anchor="ctr"/>
-          <a:lstStyle/>
-          <a:p>
-            <a:pPr algn="ctr"/>
-          </a:p>
-        </p:txBody>
-      </p:sp>
-      <p:sp>
-        <p:nvSpPr>
-          <p:cNvPr id="3" name="TextBox 2"/>
-          <p:cNvSpPr txBox="1"/>
-          <p:nvPr/>
-        </p:nvSpPr>
-        <p:spPr>
-          <a:xfrm>
-            <a:off x="594360" y="502920"/>
-            <a:ext cx="10972800" cy="868680"/>
-          </a:xfrm>
-          <a:prstGeom prst="rect">
-            <a:avLst/>
-          </a:prstGeom>
-          <a:noFill/>
-        </p:spPr>
-        <p:txBody>
-          <a:bodyPr wrap="none">
-            <a:spAutoFit/>
-          </a:bodyPr>
-          <a:lstStyle/>
-          <a:p>
-            <a:pPr>
-              <a:defRPr sz="2800" b="1">
-                <a:solidFill>
-                  <a:srgbClr val="0D2B45"/>
-                </a:solidFill>
-                <a:latin typeface="Calibri"/>
-              </a:defRPr>
-            </a:pPr>
-            <a:r>
-              <a:t>Lab prerequisites</a:t>
-            </a:r>
-          </a:p>
-        </p:txBody>
-      </p:sp>
-      <p:sp>
-        <p:nvSpPr>
-          <p:cNvPr id="4" name="Rounded Rectangle 3"/>
-          <p:cNvSpPr/>
-          <p:nvPr/>
-        </p:nvSpPr>
-        <p:spPr>
-          <a:xfrm>
-            <a:off x="502920" y="1344168"/>
-            <a:ext cx="11155680" cy="2011680"/>
-          </a:xfrm>
-          <a:prstGeom prst="roundRect">
-            <a:avLst/>
-          </a:prstGeom>
-          <a:solidFill>
-            <a:srgbClr val="FFFFFF"/>
-          </a:solidFill>
-          <a:ln w="9525">
-            <a:solidFill>
-              <a:srgbClr val="B2EBF2"/>
-            </a:solidFill>
-          </a:ln>
-        </p:spPr>
-        <p:style>
-          <a:lnRef idx="1">
-            <a:schemeClr val="accent1"/>
-          </a:lnRef>
-          <a:fillRef idx="3">
-            <a:schemeClr val="accent1"/>
-          </a:fillRef>
-          <a:effectRef idx="2">
-            <a:schemeClr val="accent1"/>
-          </a:effectRef>
-          <a:fontRef idx="minor">
-            <a:schemeClr val="lt1"/>
-          </a:fontRef>
-        </p:style>
-        <p:txBody>
-          <a:bodyPr rtlCol="0" anchor="ctr"/>
-          <a:lstStyle/>
-          <a:p>
-            <a:pPr algn="ctr"/>
-          </a:p>
-        </p:txBody>
-      </p:sp>
-      <p:sp>
-        <p:nvSpPr>
-          <p:cNvPr id="5" name="TextBox 4"/>
-          <p:cNvSpPr txBox="1"/>
-          <p:nvPr/>
-        </p:nvSpPr>
-        <p:spPr>
-          <a:xfrm>
-            <a:off x="777240" y="1463040"/>
-            <a:ext cx="10424160" cy="1828800"/>
-          </a:xfrm>
-          <a:prstGeom prst="rect">
-            <a:avLst/>
-          </a:prstGeom>
-          <a:noFill/>
-        </p:spPr>
-        <p:txBody>
-          <a:bodyPr wrap="square">
-            <a:spAutoFit/>
-          </a:bodyPr>
-          <a:lstStyle/>
-          <a:p>
-            <a:pPr>
-              <a:lnSpc>
-                <a:spcPct val="115000"/>
-              </a:lnSpc>
-              <a:spcAft>
-                <a:spcPts val="800"/>
-              </a:spcAft>
-              <a:defRPr sz="1700" b="0">
-                <a:solidFill>
-                  <a:srgbClr val="37474F"/>
-                </a:solidFill>
-                <a:latin typeface="Calibri"/>
-              </a:defRPr>
-            </a:pPr>
-            <a:r>
-              <a:t>▸  Docker and Docker Compose installed; user in the docker group.</a:t>
-            </a:r>
-          </a:p>
-          <a:p>
-            <a:pPr>
-              <a:lnSpc>
-                <a:spcPct val="115000"/>
-              </a:lnSpc>
-              <a:spcAft>
-                <a:spcPts val="800"/>
-              </a:spcAft>
-              <a:defRPr sz="1700" b="0">
-                <a:solidFill>
-                  <a:srgbClr val="37474F"/>
-                </a:solidFill>
-                <a:latin typeface="Calibri"/>
-              </a:defRPr>
-            </a:pPr>
-            <a:r>
-              <a:t>▸  Horizon: http://{{VM_IP}}/horizon — credentials admin / s4t.</a:t>
-            </a:r>
-          </a:p>
-          <a:p>
-            <a:pPr>
-              <a:lnSpc>
-                <a:spcPct val="115000"/>
-              </a:lnSpc>
-              <a:spcAft>
-                <a:spcPts val="800"/>
-              </a:spcAft>
-              <a:defRPr sz="1700" b="0">
-                <a:solidFill>
-                  <a:srgbClr val="37474F"/>
-                </a:solidFill>
-                <a:latin typeface="Calibri"/>
-              </a:defRPr>
-            </a:pPr>
-            <a:r>
-              <a:t>▸  Lightning-Rod UI: http://{{VM_IP}}:1474 — credentials me / arancino.</a:t>
-            </a:r>
-          </a:p>
-          <a:p>
-            <a:pPr>
-              <a:lnSpc>
-                <a:spcPct val="115000"/>
-              </a:lnSpc>
-              <a:spcAft>
-                <a:spcPts val="800"/>
-              </a:spcAft>
-              <a:defRPr sz="1700" b="0">
+              <a:defRPr sz="1900" b="0">
                 <a:solidFill>
                   <a:srgbClr val="37474F"/>
                 </a:solidFill>
@@ -11271,7 +11023,7 @@
           <a:lstStyle/>
           <a:p>
             <a:pPr algn="r">
-              <a:defRPr sz="1000" b="0">
+              <a:defRPr sz="1100" b="0">
                 <a:solidFill>
                   <a:srgbClr val="78909C"/>
                 </a:solidFill>
@@ -11307,7 +11059,7 @@
           <a:lstStyle/>
           <a:p>
             <a:pPr>
-              <a:defRPr sz="2400" b="1">
+              <a:defRPr sz="2600" b="1">
                 <a:solidFill>
                   <a:srgbClr val="0D2B45"/>
                 </a:solidFill>
@@ -11329,7 +11081,7 @@
         <p:spPr>
           <a:xfrm>
             <a:off x="502920" y="1554480"/>
-            <a:ext cx="11155680" cy="2651759"/>
+            <a:ext cx="11155680" cy="4800600"/>
           </a:xfrm>
           <a:prstGeom prst="roundRect">
             <a:avLst/>
@@ -11374,7 +11126,7 @@
         <p:spPr>
           <a:xfrm>
             <a:off x="777240" y="1673352"/>
-            <a:ext cx="10424160" cy="2468879"/>
+            <a:ext cx="10424160" cy="4572000"/>
           </a:xfrm>
           <a:prstGeom prst="rect">
             <a:avLst/>
@@ -11394,7 +11146,7 @@
               <a:spcAft>
                 <a:spcPts val="500"/>
               </a:spcAft>
-              <a:defRPr sz="1500" b="0">
+              <a:defRPr sz="1600" b="0">
                 <a:solidFill>
                   <a:srgbClr val="37474F"/>
                 </a:solidFill>
@@ -11413,7 +11165,7 @@
               <a:spcAft>
                 <a:spcPts val="500"/>
               </a:spcAft>
-              <a:defRPr sz="1500" b="0">
+              <a:defRPr sz="1600" b="0">
                 <a:solidFill>
                   <a:srgbClr val="37474F"/>
                 </a:solidFill>
@@ -11432,7 +11184,7 @@
               <a:spcAft>
                 <a:spcPts val="500"/>
               </a:spcAft>
-              <a:defRPr sz="1500" b="0">
+              <a:defRPr sz="1600" b="0">
                 <a:solidFill>
                   <a:srgbClr val="37474F"/>
                 </a:solidFill>
@@ -11451,7 +11203,7 @@
               <a:spcAft>
                 <a:spcPts val="500"/>
               </a:spcAft>
-              <a:defRPr sz="1500" b="0">
+              <a:defRPr sz="1600" b="0">
                 <a:solidFill>
                   <a:srgbClr val="37474F"/>
                 </a:solidFill>
@@ -11470,7 +11222,7 @@
               <a:spcAft>
                 <a:spcPts val="500"/>
               </a:spcAft>
-              <a:defRPr sz="1500" b="0">
+              <a:defRPr sz="1600" b="0">
                 <a:solidFill>
                   <a:srgbClr val="37474F"/>
                 </a:solidFill>
@@ -11489,7 +11241,7 @@
               <a:spcAft>
                 <a:spcPts val="500"/>
               </a:spcAft>
-              <a:defRPr sz="1500" b="0">
+              <a:defRPr sz="1600" b="0">
                 <a:solidFill>
                   <a:srgbClr val="37474F"/>
                 </a:solidFill>
@@ -11626,6 +11378,147 @@
 </file>
 
 <file path=ppt/slides/slide4.xml><?xml version="1.0" encoding="utf-8"?>
+<p:sld xmlns:a="http://schemas.openxmlformats.org/drawingml/2006/main" xmlns:p="http://schemas.openxmlformats.org/presentationml/2006/main" xmlns:r="http://schemas.openxmlformats.org/officeDocument/2006/relationships">
+  <p:cSld>
+    <p:bg>
+      <p:bgPr>
+        <a:solidFill>
+          <a:srgbClr val="0D2B45"/>
+        </a:solidFill>
+        <a:effectLst/>
+      </p:bgPr>
+    </p:bg>
+    <p:spTree>
+      <p:nvGrpSpPr>
+        <p:cNvPr id="1" name=""/>
+        <p:cNvGrpSpPr/>
+        <p:nvPr/>
+      </p:nvGrpSpPr>
+      <p:grpSpPr/>
+      <p:sp>
+        <p:nvSpPr>
+          <p:cNvPr id="2" name="Rectangle 1"/>
+          <p:cNvSpPr/>
+          <p:nvPr/>
+        </p:nvSpPr>
+        <p:spPr>
+          <a:xfrm>
+            <a:off x="0" y="3063240"/>
+            <a:ext cx="12191695" cy="54864"/>
+          </a:xfrm>
+          <a:prstGeom prst="rect">
+            <a:avLst/>
+          </a:prstGeom>
+          <a:solidFill>
+            <a:srgbClr val="008B9A"/>
+          </a:solidFill>
+          <a:ln>
+            <a:noFill/>
+          </a:ln>
+        </p:spPr>
+        <p:style>
+          <a:lnRef idx="1">
+            <a:schemeClr val="accent1"/>
+          </a:lnRef>
+          <a:fillRef idx="3">
+            <a:schemeClr val="accent1"/>
+          </a:fillRef>
+          <a:effectRef idx="2">
+            <a:schemeClr val="accent1"/>
+          </a:effectRef>
+          <a:fontRef idx="minor">
+            <a:schemeClr val="lt1"/>
+          </a:fontRef>
+        </p:style>
+        <p:txBody>
+          <a:bodyPr rtlCol="0" anchor="ctr"/>
+          <a:lstStyle/>
+          <a:p>
+            <a:pPr algn="ctr"/>
+          </a:p>
+        </p:txBody>
+      </p:sp>
+      <p:sp>
+        <p:nvSpPr>
+          <p:cNvPr id="3" name="TextBox 2"/>
+          <p:cNvSpPr txBox="1"/>
+          <p:nvPr/>
+        </p:nvSpPr>
+        <p:spPr>
+          <a:xfrm>
+            <a:off x="731520" y="2148840"/>
+            <a:ext cx="10515600" cy="1097280"/>
+          </a:xfrm>
+          <a:prstGeom prst="rect">
+            <a:avLst/>
+          </a:prstGeom>
+          <a:noFill/>
+        </p:spPr>
+        <p:txBody>
+          <a:bodyPr wrap="none">
+            <a:spAutoFit/>
+          </a:bodyPr>
+          <a:lstStyle/>
+          <a:p>
+            <a:pPr algn="ctr">
+              <a:defRPr sz="3800" b="1">
+                <a:solidFill>
+                  <a:srgbClr val="FFFFFF"/>
+                </a:solidFill>
+                <a:latin typeface="Calibri"/>
+              </a:defRPr>
+            </a:pPr>
+            <a:r>
+              <a:t>Lab workflow</a:t>
+            </a:r>
+          </a:p>
+        </p:txBody>
+      </p:sp>
+      <p:sp>
+        <p:nvSpPr>
+          <p:cNvPr id="4" name="TextBox 3"/>
+          <p:cNvSpPr txBox="1"/>
+          <p:nvPr/>
+        </p:nvSpPr>
+        <p:spPr>
+          <a:xfrm>
+            <a:off x="731520" y="3337560"/>
+            <a:ext cx="10515600" cy="822960"/>
+          </a:xfrm>
+          <a:prstGeom prst="rect">
+            <a:avLst/>
+          </a:prstGeom>
+          <a:noFill/>
+        </p:spPr>
+        <p:txBody>
+          <a:bodyPr wrap="none">
+            <a:spAutoFit/>
+          </a:bodyPr>
+          <a:lstStyle/>
+          <a:p>
+            <a:pPr algn="ctr">
+              <a:defRPr sz="2200" b="0">
+                <a:solidFill>
+                  <a:srgbClr val="B2EBF2"/>
+                </a:solidFill>
+                <a:latin typeface="Calibri"/>
+              </a:defRPr>
+            </a:pPr>
+            <a:r>
+              <a:t>End-to-end pipeline — UML sequence</a:t>
+            </a:r>
+          </a:p>
+        </p:txBody>
+      </p:sp>
+    </p:spTree>
+  </p:cSld>
+  <p:clrMapOvr>
+    <a:masterClrMapping/>
+  </p:clrMapOvr>
+</p:sld>
+</file>
+
+<file path=ppt/slides/slide5.xml><?xml version="1.0" encoding="utf-8"?>
 <p:sld xmlns:a="http://schemas.openxmlformats.org/drawingml/2006/main" xmlns:p="http://schemas.openxmlformats.org/presentationml/2006/main" xmlns:r="http://schemas.openxmlformats.org/officeDocument/2006/relationships">
   <p:cSld>
     <p:bg>
@@ -11762,7 +11655,7 @@
           <a:lstStyle/>
           <a:p>
             <a:pPr algn="r">
-              <a:defRPr sz="1000" b="0">
+              <a:defRPr sz="1100" b="0">
                 <a:solidFill>
                   <a:srgbClr val="78909C"/>
                 </a:solidFill>
@@ -11770,7 +11663,7 @@
               </a:defRPr>
             </a:pPr>
             <a:r>
-              <a:t>training/docs/MODULES.md</a:t>
+              <a:t>scripts/build-all.sh · docs/MODULES.md</a:t>
             </a:r>
           </a:p>
         </p:txBody>
@@ -11798,7 +11691,7 @@
           <a:lstStyle/>
           <a:p>
             <a:pPr>
-              <a:defRPr sz="2400" b="1">
+              <a:defRPr sz="2600" b="1">
                 <a:solidFill>
                   <a:srgbClr val="0D2B45"/>
                 </a:solidFill>
@@ -11806,7 +11699,7 @@
               </a:defRPr>
             </a:pPr>
             <a:r>
-              <a:t>Modular timing model</a:t>
+              <a:t>Training lab workflow — five steps</a:t>
             </a:r>
           </a:p>
         </p:txBody>
@@ -11820,7 +11713,7 @@
         <p:spPr>
           <a:xfrm>
             <a:off x="502920" y="1554480"/>
-            <a:ext cx="11155680" cy="2651759"/>
+            <a:ext cx="11155680" cy="4800600"/>
           </a:xfrm>
           <a:prstGeom prst="roundRect">
             <a:avLst/>
@@ -11865,7 +11758,7 @@
         <p:spPr>
           <a:xfrm>
             <a:off x="777240" y="1673352"/>
-            <a:ext cx="10424160" cy="2468879"/>
+            <a:ext cx="10424160" cy="4572000"/>
           </a:xfrm>
           <a:prstGeom prst="rect">
             <a:avLst/>
@@ -11885,7 +11778,7 @@
               <a:spcAft>
                 <a:spcPts val="500"/>
               </a:spcAft>
-              <a:defRPr sz="1500" b="0">
+              <a:defRPr sz="1600" b="0">
                 <a:solidFill>
                   <a:srgbClr val="37474F"/>
                 </a:solidFill>
@@ -11893,7 +11786,7 @@
               </a:defRPr>
             </a:pPr>
             <a:r>
-              <a:t>▸  Minimum (3h): Modules A + B + C — deploy, plugins, environmental publisher.</a:t>
+              <a:t>▸  Step 1: Clone AssemblingSmartCPS org repos (ch13, ch14, ch15, ch05, ch19, ch11) via scripts/clone-repos.sh.</a:t>
             </a:r>
           </a:p>
           <a:p>
@@ -11904,7 +11797,7 @@
               <a:spcAft>
                 <a:spcPts val="500"/>
               </a:spcAft>
-              <a:defRPr sz="1500" b="0">
+              <a:defRPr sz="1600" b="0">
                 <a:solidFill>
                   <a:srgbClr val="37474F"/>
                 </a:solidFill>
@@ -11912,7 +11805,7 @@
               </a:defRPr>
             </a:pPr>
             <a:r>
-              <a:t>▸  Standard (6h): Core + D Multi-board + E Virtual Networking + F Web Services.</a:t>
+              <a:t>▸  Step 2: Start Stack4Things with Docker Compose + training/patches/docker-compose.lab.yml overlay.</a:t>
             </a:r>
           </a:p>
           <a:p>
@@ -11923,7 +11816,7 @@
               <a:spcAft>
                 <a:spcPts val="500"/>
               </a:spcAft>
-              <a:defRPr sz="1500" b="0">
+              <a:defRPr sz="1600" b="0">
                 <a:solidFill>
                   <a:srgbClr val="37474F"/>
                 </a:solidFill>
@@ -11931,7 +11824,7 @@
               </a:defRPr>
             </a:pPr>
             <a:r>
-              <a:t>▸  Full (9h): Core + all extensions + G FL + H Blueprint + I FaaS theory.</a:t>
+              <a:t>▸  Step 3: Run validate/validate-all.sh — all module checks must PASS before the session.</a:t>
             </a:r>
           </a:p>
           <a:p>
@@ -11942,7 +11835,7 @@
               <a:spcAft>
                 <a:spcPts val="500"/>
               </a:spcAft>
-              <a:defRPr sz="1500" b="0">
+              <a:defRPr sz="1600" b="0">
                 <a:solidFill>
                   <a:srgbClr val="37474F"/>
                 </a:solidFill>
@@ -11950,7 +11843,7 @@
               </a:defRPr>
             </a:pPr>
             <a:r>
-              <a:t>▸  Module E (Virtual Networking) is optional when Neutron backend is unavailable.</a:t>
+              <a:t>▸  Step 4: Use pre-built PPTX in slides/ or regenerate with scripts/generate_diagrams.py + generate_slides_modular_en.py.</a:t>
             </a:r>
           </a:p>
           <a:p>
@@ -11961,7 +11854,7 @@
               <a:spcAft>
                 <a:spcPts val="500"/>
               </a:spcAft>
-              <a:defRPr sz="1500" b="0">
+              <a:defRPr sz="1600" b="0">
                 <a:solidFill>
                   <a:srgbClr val="37474F"/>
                 </a:solidFill>
@@ -11969,7 +11862,7 @@
               </a:defRPr>
             </a:pPr>
             <a:r>
-              <a:t>▸  Modules G and H should not run on the same VM simultaneously (RAM ≥ 8 GB).</a:t>
+              <a:t>▸  Step 5: Deliver modules A–I using Module*.pptx decks; re-run module validators after each lab block.</a:t>
             </a:r>
           </a:p>
           <a:p>
@@ -11980,7 +11873,7 @@
               <a:spcAft>
                 <a:spcPts val="500"/>
               </a:spcAft>
-              <a:defRPr sz="1500" b="0">
+              <a:defRPr sz="1600" b="0">
                 <a:solidFill>
                   <a:srgbClr val="37474F"/>
                 </a:solidFill>
@@ -11988,7 +11881,7 @@
               </a:defRPr>
             </a:pPr>
             <a:r>
-              <a:t>▸  Each deck is self-contained; pick the path that matches your session length.</a:t>
+              <a:t>▸  Public repo: github.com/lucadagati/AssemblyingCPS_training</a:t>
             </a:r>
           </a:p>
         </p:txBody>
@@ -12116,7 +12009,7 @@
 </p:sld>
 </file>
 
-<file path=ppt/slides/slide5.xml><?xml version="1.0" encoding="utf-8"?>
+<file path=ppt/slides/slide6.xml><?xml version="1.0" encoding="utf-8"?>
 <p:sld xmlns:a="http://schemas.openxmlformats.org/drawingml/2006/main" xmlns:p="http://schemas.openxmlformats.org/presentationml/2006/main" xmlns:r="http://schemas.openxmlformats.org/officeDocument/2006/relationships">
   <p:cSld>
     <p:bg>
@@ -12149,7 +12042,7 @@
             <a:avLst/>
           </a:prstGeom>
           <a:solidFill>
-            <a:srgbClr val="1A4A6E"/>
+            <a:srgbClr val="008B9A"/>
           </a:solidFill>
           <a:ln>
             <a:noFill/>
@@ -12185,7 +12078,7 @@
         </p:nvSpPr>
         <p:spPr>
           <a:xfrm>
-            <a:off x="594360" y="502920"/>
+            <a:off x="594360" y="347472"/>
             <a:ext cx="10972800" cy="868680"/>
           </a:xfrm>
           <a:prstGeom prst="rect">
@@ -12200,7 +12093,7 @@
           <a:lstStyle/>
           <a:p>
             <a:pPr>
-              <a:defRPr sz="2800" b="1">
+              <a:defRPr sz="2200" b="1">
                 <a:solidFill>
                   <a:srgbClr val="0D2B45"/>
                 </a:solidFill>
@@ -12208,7 +12101,7 @@
               </a:defRPr>
             </a:pPr>
             <a:r>
-              <a:t>Training paths — pick one</a:t>
+              <a:t>UML — End-to-end training workflow</a:t>
             </a:r>
           </a:p>
         </p:txBody>
@@ -12221,8 +12114,8 @@
         </p:nvSpPr>
         <p:spPr>
           <a:xfrm>
-            <a:off x="502920" y="1344168"/>
-            <a:ext cx="11155680" cy="2331720"/>
+            <a:off x="1240383" y="1298448"/>
+            <a:ext cx="9710928" cy="5733288"/>
           </a:xfrm>
           <a:prstGeom prst="roundRect">
             <a:avLst/>
@@ -12230,7 +12123,7 @@
           <a:solidFill>
             <a:srgbClr val="FFFFFF"/>
           </a:solidFill>
-          <a:ln w="9525">
+          <a:ln w="12700">
             <a:solidFill>
               <a:srgbClr val="B2EBF2"/>
             </a:solidFill>
@@ -12258,16 +12151,40 @@
           </a:p>
         </p:txBody>
       </p:sp>
-      <p:sp>
-        <p:nvSpPr>
-          <p:cNvPr id="5" name="TextBox 4"/>
+      <p:pic>
+        <p:nvPicPr>
+          <p:cNvPr id="5" name="Picture 4" descr="seq-training-workflow.png"/>
+          <p:cNvPicPr>
+            <a:picLocks noChangeAspect="1"/>
+          </p:cNvPicPr>
+          <p:nvPr/>
+        </p:nvPicPr>
+        <p:blipFill>
+          <a:blip r:embed="rId2"/>
+          <a:stretch>
+            <a:fillRect/>
+          </a:stretch>
+        </p:blipFill>
+        <p:spPr>
+          <a:xfrm>
+            <a:off x="1295247" y="1353312"/>
+            <a:ext cx="9601200" cy="5623560"/>
+          </a:xfrm>
+          <a:prstGeom prst="rect">
+            <a:avLst/>
+          </a:prstGeom>
+        </p:spPr>
+      </p:pic>
+      <p:sp>
+        <p:nvSpPr>
+          <p:cNvPr id="6" name="TextBox 5"/>
           <p:cNvSpPr txBox="1"/>
           <p:nvPr/>
         </p:nvSpPr>
         <p:spPr>
           <a:xfrm>
-            <a:off x="777240" y="1463040"/>
-            <a:ext cx="10424160" cy="2148840"/>
+            <a:off x="594360" y="7168896"/>
+            <a:ext cx="10972800" cy="411480"/>
           </a:xfrm>
           <a:prstGeom prst="rect">
             <a:avLst/>
@@ -12275,19 +12192,13 @@
           <a:noFill/>
         </p:spPr>
         <p:txBody>
-          <a:bodyPr wrap="square">
+          <a:bodyPr wrap="none">
             <a:spAutoFit/>
           </a:bodyPr>
           <a:lstStyle/>
           <a:p>
             <a:pPr>
-              <a:lnSpc>
-                <a:spcPct val="115000"/>
-              </a:lnSpc>
-              <a:spcAft>
-                <a:spcPts val="800"/>
-              </a:spcAft>
-              <a:defRPr sz="1700" b="0">
+              <a:defRPr sz="1200" b="0">
                 <a:solidFill>
                   <a:srgbClr val="37474F"/>
                 </a:solidFill>
@@ -12295,90 +12206,14 @@
               </a:defRPr>
             </a:pPr>
             <a:r>
-              <a:t>▸  3h CORE → A+B+C · deliverable: Active board + HelloName + InfluxDB rows</a:t>
-            </a:r>
-          </a:p>
-          <a:p>
-            <a:pPr>
-              <a:lnSpc>
-                <a:spcPct val="115000"/>
-              </a:lnSpc>
-              <a:spcAft>
-                <a:spcPts val="800"/>
-              </a:spcAft>
-              <a:defRPr sz="1700" b="0">
-                <a:solidFill>
-                  <a:srgbClr val="37474F"/>
-                </a:solidFill>
-                <a:latin typeface="Calibri"/>
-              </a:defRPr>
-            </a:pPr>
-            <a:r>
-              <a:t>▸  6h STANDARD → Core + D fleet + E VN (opt.) + F WoT/WSTUN tunnels</a:t>
-            </a:r>
-          </a:p>
-          <a:p>
-            <a:pPr>
-              <a:lnSpc>
-                <a:spcPct val="115000"/>
-              </a:lnSpc>
-              <a:spcAft>
-                <a:spcPts val="800"/>
-              </a:spcAft>
-              <a:defRPr sz="1700" b="0">
-                <a:solidFill>
-                  <a:srgbClr val="37474F"/>
-                </a:solidFill>
-                <a:latin typeface="Calibri"/>
-              </a:defRPr>
-            </a:pPr>
-            <a:r>
-              <a:t>▸  9h FULL → Standard + G FL rounds + H Blueprint/K3s + I FaaS taxonomy</a:t>
-            </a:r>
-          </a:p>
-          <a:p>
-            <a:pPr>
-              <a:lnSpc>
-                <a:spcPct val="115000"/>
-              </a:lnSpc>
-              <a:spcAft>
-                <a:spcPts val="800"/>
-              </a:spcAft>
-              <a:defRPr sz="1700" b="0">
-                <a:solidFill>
-                  <a:srgbClr val="37474F"/>
-                </a:solidFill>
-                <a:latin typeface="Calibri"/>
-              </a:defRPr>
-            </a:pPr>
-            <a:r>
-              <a:t>▸  Credentials: Horizon admin / s4t · Lightning-Rod me / arancino</a:t>
-            </a:r>
-          </a:p>
-          <a:p>
-            <a:pPr>
-              <a:lnSpc>
-                <a:spcPct val="115000"/>
-              </a:lnSpc>
-              <a:spcAft>
-                <a:spcPts val="800"/>
-              </a:spcAft>
-              <a:defRPr sz="1700" b="0">
-                <a:solidFill>
-                  <a:srgbClr val="37474F"/>
-                </a:solidFill>
-                <a:latin typeface="Calibri"/>
-              </a:defRPr>
-            </a:pPr>
-            <a:r>
-              <a:t>▸  Materials: github.com/lucadagati/AssemblyingCPS_training</a:t>
-            </a:r>
-          </a:p>
-        </p:txBody>
-      </p:sp>
-      <p:sp>
-        <p:nvSpPr>
-          <p:cNvPr id="6" name="Rectangle 5"/>
+              <a:t>Clone repos → Docker up → validate → generate slides → teach modules A–I</a:t>
+            </a:r>
+          </a:p>
+        </p:txBody>
+      </p:sp>
+      <p:sp>
+        <p:nvSpPr>
+          <p:cNvPr id="7" name="Rectangle 6"/>
           <p:cNvSpPr/>
           <p:nvPr/>
         </p:nvSpPr>
@@ -12421,7 +12256,7 @@
       </p:sp>
       <p:sp>
         <p:nvSpPr>
-          <p:cNvPr id="7" name="TextBox 6"/>
+          <p:cNvPr id="8" name="TextBox 7"/>
           <p:cNvSpPr txBox="1"/>
           <p:nvPr/>
         </p:nvSpPr>
@@ -12455,85 +12290,16 @@
           </a:p>
         </p:txBody>
       </p:sp>
-    </p:spTree>
-  </p:cSld>
-  <p:clrMapOvr>
-    <a:masterClrMapping/>
-  </p:clrMapOvr>
-</p:sld>
-</file>
-
-<file path=ppt/slides/slide6.xml><?xml version="1.0" encoding="utf-8"?>
-<p:sld xmlns:a="http://schemas.openxmlformats.org/drawingml/2006/main" xmlns:p="http://schemas.openxmlformats.org/presentationml/2006/main" xmlns:r="http://schemas.openxmlformats.org/officeDocument/2006/relationships">
-  <p:cSld>
-    <p:bg>
-      <p:bgPr>
-        <a:solidFill>
-          <a:srgbClr val="0D2B45"/>
-        </a:solidFill>
-        <a:effectLst/>
-      </p:bgPr>
-    </p:bg>
-    <p:spTree>
-      <p:nvGrpSpPr>
-        <p:cNvPr id="1" name=""/>
-        <p:cNvGrpSpPr/>
-        <p:nvPr/>
-      </p:nvGrpSpPr>
-      <p:grpSpPr/>
-      <p:sp>
-        <p:nvSpPr>
-          <p:cNvPr id="2" name="Rectangle 1"/>
-          <p:cNvSpPr/>
-          <p:nvPr/>
-        </p:nvSpPr>
-        <p:spPr>
-          <a:xfrm>
-            <a:off x="0" y="3063240"/>
-            <a:ext cx="12191695" cy="54864"/>
-          </a:xfrm>
-          <a:prstGeom prst="rect">
-            <a:avLst/>
-          </a:prstGeom>
-          <a:solidFill>
-            <a:srgbClr val="008B9A"/>
-          </a:solidFill>
-          <a:ln>
-            <a:noFill/>
-          </a:ln>
-        </p:spPr>
-        <p:style>
-          <a:lnRef idx="1">
-            <a:schemeClr val="accent1"/>
-          </a:lnRef>
-          <a:fillRef idx="3">
-            <a:schemeClr val="accent1"/>
-          </a:fillRef>
-          <a:effectRef idx="2">
-            <a:schemeClr val="accent1"/>
-          </a:effectRef>
-          <a:fontRef idx="minor">
-            <a:schemeClr val="lt1"/>
-          </a:fontRef>
-        </p:style>
-        <p:txBody>
-          <a:bodyPr rtlCol="0" anchor="ctr"/>
-          <a:lstStyle/>
-          <a:p>
-            <a:pPr algn="ctr"/>
-          </a:p>
-        </p:txBody>
-      </p:sp>
-      <p:sp>
-        <p:nvSpPr>
-          <p:cNvPr id="3" name="TextBox 2"/>
+      <p:sp>
+        <p:nvSpPr>
+          <p:cNvPr id="9" name="TextBox 8"/>
           <p:cNvSpPr txBox="1"/>
           <p:nvPr/>
         </p:nvSpPr>
         <p:spPr>
           <a:xfrm>
-            <a:off x="731520" y="2148840"/>
-            <a:ext cx="10515600" cy="1097280"/>
+            <a:off x="9326880" y="6455664"/>
+            <a:ext cx="2377440" cy="320040"/>
           </a:xfrm>
           <a:prstGeom prst="rect">
             <a:avLst/>
@@ -12546,52 +12312,16 @@
           </a:bodyPr>
           <a:lstStyle/>
           <a:p>
-            <a:pPr algn="ctr">
-              <a:defRPr sz="3600" b="1">
-                <a:solidFill>
-                  <a:srgbClr val="FFFFFF"/>
-                </a:solidFill>
-                <a:latin typeface="Calibri"/>
-              </a:defRPr>
-            </a:pPr>
-            <a:r>
-              <a:t>Lab workflow</a:t>
-            </a:r>
-          </a:p>
-        </p:txBody>
-      </p:sp>
-      <p:sp>
-        <p:nvSpPr>
-          <p:cNvPr id="4" name="TextBox 3"/>
-          <p:cNvSpPr txBox="1"/>
-          <p:nvPr/>
-        </p:nvSpPr>
-        <p:spPr>
-          <a:xfrm>
-            <a:off x="731520" y="3337560"/>
-            <a:ext cx="10515600" cy="822960"/>
-          </a:xfrm>
-          <a:prstGeom prst="rect">
-            <a:avLst/>
-          </a:prstGeom>
-          <a:noFill/>
-        </p:spPr>
-        <p:txBody>
-          <a:bodyPr wrap="none">
-            <a:spAutoFit/>
-          </a:bodyPr>
-          <a:lstStyle/>
-          <a:p>
-            <a:pPr algn="ctr">
-              <a:defRPr sz="2000" b="0">
-                <a:solidFill>
-                  <a:srgbClr val="B2EBF2"/>
-                </a:solidFill>
-                <a:latin typeface="Calibri"/>
-              </a:defRPr>
-            </a:pPr>
-            <a:r>
-              <a:t>End-to-end pipeline — UML sequence</a:t>
+            <a:pPr algn="r">
+              <a:defRPr sz="900" b="1">
+                <a:solidFill>
+                  <a:srgbClr val="008B9A"/>
+                </a:solidFill>
+                <a:latin typeface="Calibri"/>
+              </a:defRPr>
+            </a:pPr>
+            <a:r>
+              <a:t>Diagram</a:t>
             </a:r>
           </a:p>
         </p:txBody>
@@ -12741,7 +12471,7 @@
           <a:lstStyle/>
           <a:p>
             <a:pPr algn="r">
-              <a:defRPr sz="1000" b="0">
+              <a:defRPr sz="1100" b="0">
                 <a:solidFill>
                   <a:srgbClr val="78909C"/>
                 </a:solidFill>
@@ -12749,7 +12479,7 @@
               </a:defRPr>
             </a:pPr>
             <a:r>
-              <a:t>scripts/build-all.sh · INSTRUCTOR_PLAYBOOK.md</a:t>
+              <a:t>diagrams/seq-*.png · generate_diagrams.py</a:t>
             </a:r>
           </a:p>
         </p:txBody>
@@ -12777,7 +12507,7 @@
           <a:lstStyle/>
           <a:p>
             <a:pPr>
-              <a:defRPr sz="2400" b="1">
+              <a:defRPr sz="2600" b="1">
                 <a:solidFill>
                   <a:srgbClr val="0D2B45"/>
                 </a:solidFill>
@@ -12785,7 +12515,7 @@
               </a:defRPr>
             </a:pPr>
             <a:r>
-              <a:t>Training lab workflow — five steps</a:t>
+              <a:t>Per-module UML sequence diagrams</a:t>
             </a:r>
           </a:p>
         </p:txBody>
@@ -12799,7 +12529,7 @@
         <p:spPr>
           <a:xfrm>
             <a:off x="502920" y="1554480"/>
-            <a:ext cx="11155680" cy="2651759"/>
+            <a:ext cx="11155680" cy="4800600"/>
           </a:xfrm>
           <a:prstGeom prst="roundRect">
             <a:avLst/>
@@ -12844,7 +12574,7 @@
         <p:spPr>
           <a:xfrm>
             <a:off x="777240" y="1673352"/>
-            <a:ext cx="10424160" cy="2468879"/>
+            <a:ext cx="10424160" cy="4572000"/>
           </a:xfrm>
           <a:prstGeom prst="rect">
             <a:avLst/>
@@ -12864,7 +12594,7 @@
               <a:spcAft>
                 <a:spcPts val="500"/>
               </a:spcAft>
-              <a:defRPr sz="1500" b="0">
+              <a:defRPr sz="1600" b="0">
                 <a:solidFill>
                   <a:srgbClr val="37474F"/>
                 </a:solidFill>
@@ -12872,7 +12602,7 @@
               </a:defRPr>
             </a:pPr>
             <a:r>
-              <a:t>▸  Step 1: Clone AssemblingSmartCPS org repos (ch13, ch14, ch15, ch05, ch19, ch11) via scripts/clone-repos.sh.</a:t>
+              <a:t>▸  Each module deck includes sequence diagrams for the primary hands-on workflow (not only architecture boxes).</a:t>
             </a:r>
           </a:p>
           <a:p>
@@ -12883,7 +12613,7 @@
               <a:spcAft>
                 <a:spcPts val="500"/>
               </a:spcAft>
-              <a:defRPr sz="1500" b="0">
+              <a:defRPr sz="1600" b="0">
                 <a:solidFill>
                   <a:srgbClr val="37474F"/>
                 </a:solidFill>
@@ -12891,7 +12621,7 @@
               </a:defRPr>
             </a:pPr>
             <a:r>
-              <a:t>▸  Step 2: Start Stack4Things with Docker Compose + training/patches/docker-compose.lab.yml overlay.</a:t>
+              <a:t>▸  Module A: board onboarding — Horizon → Conductor → Crossbar → Lightning-Rod → Active.</a:t>
             </a:r>
           </a:p>
           <a:p>
@@ -12902,7 +12632,7 @@
               <a:spcAft>
                 <a:spcPts val="500"/>
               </a:spcAft>
-              <a:defRPr sz="1500" b="0">
+              <a:defRPr sz="1600" b="0">
                 <a:solidFill>
                   <a:srgbClr val="37474F"/>
                 </a:solidFill>
@@ -12910,7 +12640,7 @@
               </a:defRPr>
             </a:pPr>
             <a:r>
-              <a:t>▸  Step 3: Run validate/validate-all.sh — all module checks must PASS before the session.</a:t>
+              <a:t>▸  Module B: sync Plugin Call — inject → WAMP rpc → Worker.run() → result to Horizon.</a:t>
             </a:r>
           </a:p>
           <a:p>
@@ -12921,7 +12651,7 @@
               <a:spcAft>
                 <a:spcPts val="500"/>
               </a:spcAft>
-              <a:defRPr sz="1500" b="0">
+              <a:defRPr sz="1600" b="0">
                 <a:solidFill>
                   <a:srgbClr val="37474F"/>
                 </a:solidFill>
@@ -12929,7 +12659,7 @@
               </a:defRPr>
             </a:pPr>
             <a:r>
-              <a:t>▸  Step 4: Use pre-built PPTX in slides/ or regenerate with scripts/generate_diagrams.py + generate_slides_modular_en.py.</a:t>
+              <a:t>▸  Module C: async loop — Start plugin → CSV row → InfluxDB every 30s.</a:t>
             </a:r>
           </a:p>
           <a:p>
@@ -12940,7 +12670,7 @@
               <a:spcAft>
                 <a:spcPts val="500"/>
               </a:spcAft>
-              <a:defRPr sz="1500" b="0">
+              <a:defRPr sz="1600" b="0">
                 <a:solidFill>
                   <a:srgbClr val="37474F"/>
                 </a:solidFill>
@@ -12948,7 +12678,7 @@
               </a:defRPr>
             </a:pPr>
             <a:r>
-              <a:t>▸  Step 5: Deliver modules A–I using Module*.pptx decks; re-run module validators after each lab block.</a:t>
+              <a:t>▸  Module D: fleet inject to three boards · Module F: ServiceEnable + WSTUN tunnel.</a:t>
             </a:r>
           </a:p>
           <a:p>
@@ -12959,7 +12689,7 @@
               <a:spcAft>
                 <a:spcPts val="500"/>
               </a:spcAft>
-              <a:defRPr sz="1500" b="0">
+              <a:defRPr sz="1600" b="0">
                 <a:solidFill>
                   <a:srgbClr val="37474F"/>
                 </a:solidFill>
@@ -12967,7 +12697,7 @@
               </a:defRPr>
             </a:pPr>
             <a:r>
-              <a:t>▸  Public repo: github.com/lucadagati/AssemblyingCPS_training</a:t>
+              <a:t>▸  Module G: Flower FedAvg round across three edge clients.</a:t>
             </a:r>
           </a:p>
         </p:txBody>
@@ -13101,7 +12831,7 @@
     <p:bg>
       <p:bgPr>
         <a:solidFill>
-          <a:srgbClr val="F8FAFC"/>
+          <a:srgbClr val="0D2B45"/>
         </a:solidFill>
         <a:effectLst/>
       </p:bgPr>
@@ -13121,7 +12851,7 @@
         </p:nvSpPr>
         <p:spPr>
           <a:xfrm>
-            <a:off x="0" y="0"/>
+            <a:off x="0" y="3063240"/>
             <a:ext cx="12191695" cy="54864"/>
           </a:xfrm>
           <a:prstGeom prst="rect">
@@ -13164,8 +12894,8 @@
         </p:nvSpPr>
         <p:spPr>
           <a:xfrm>
-            <a:off x="594360" y="438912"/>
-            <a:ext cx="10972800" cy="868680"/>
+            <a:off x="731520" y="2148840"/>
+            <a:ext cx="10515600" cy="1097280"/>
           </a:xfrm>
           <a:prstGeom prst="rect">
             <a:avLst/>
@@ -13178,99 +12908,30 @@
           </a:bodyPr>
           <a:lstStyle/>
           <a:p>
-            <a:pPr>
-              <a:defRPr sz="2200" b="1">
-                <a:solidFill>
-                  <a:srgbClr val="0D2B45"/>
-                </a:solidFill>
-                <a:latin typeface="Calibri"/>
-              </a:defRPr>
-            </a:pPr>
-            <a:r>
-              <a:t>UML — End-to-end training workflow</a:t>
-            </a:r>
-          </a:p>
-        </p:txBody>
-      </p:sp>
-      <p:sp>
-        <p:nvSpPr>
-          <p:cNvPr id="4" name="Rounded Rectangle 3"/>
-          <p:cNvSpPr/>
-          <p:nvPr/>
-        </p:nvSpPr>
-        <p:spPr>
-          <a:xfrm>
-            <a:off x="2627149" y="1426464"/>
-            <a:ext cx="6937396" cy="4123944"/>
-          </a:xfrm>
-          <a:prstGeom prst="roundRect">
-            <a:avLst/>
-          </a:prstGeom>
-          <a:solidFill>
-            <a:srgbClr val="FFFFFF"/>
-          </a:solidFill>
-          <a:ln w="12700">
-            <a:solidFill>
-              <a:srgbClr val="B2EBF2"/>
-            </a:solidFill>
-          </a:ln>
-        </p:spPr>
-        <p:style>
-          <a:lnRef idx="1">
-            <a:schemeClr val="accent1"/>
-          </a:lnRef>
-          <a:fillRef idx="3">
-            <a:schemeClr val="accent1"/>
-          </a:fillRef>
-          <a:effectRef idx="2">
-            <a:schemeClr val="accent1"/>
-          </a:effectRef>
-          <a:fontRef idx="minor">
-            <a:schemeClr val="lt1"/>
-          </a:fontRef>
-        </p:style>
-        <p:txBody>
-          <a:bodyPr rtlCol="0" anchor="ctr"/>
-          <a:lstStyle/>
-          <a:p>
-            <a:pPr algn="ctr"/>
-          </a:p>
-        </p:txBody>
-      </p:sp>
-      <p:pic>
-        <p:nvPicPr>
-          <p:cNvPr id="5" name="Picture 4" descr="seq-training-workflow.png"/>
-          <p:cNvPicPr>
-            <a:picLocks noChangeAspect="1"/>
-          </p:cNvPicPr>
-          <p:nvPr/>
-        </p:nvPicPr>
-        <p:blipFill>
-          <a:blip r:embed="rId2"/>
-          <a:stretch>
-            <a:fillRect/>
-          </a:stretch>
-        </p:blipFill>
-        <p:spPr>
-          <a:xfrm>
-            <a:off x="2700301" y="1499616"/>
-            <a:ext cx="6791092" cy="3977639"/>
-          </a:xfrm>
-          <a:prstGeom prst="rect">
-            <a:avLst/>
-          </a:prstGeom>
-        </p:spPr>
-      </p:pic>
-      <p:sp>
-        <p:nvSpPr>
-          <p:cNvPr id="6" name="TextBox 5"/>
+            <a:pPr algn="ctr">
+              <a:defRPr sz="3800" b="1">
+                <a:solidFill>
+                  <a:srgbClr val="FFFFFF"/>
+                </a:solidFill>
+                <a:latin typeface="Calibri"/>
+              </a:defRPr>
+            </a:pPr>
+            <a:r>
+              <a:t>Book coverage map</a:t>
+            </a:r>
+          </a:p>
+        </p:txBody>
+      </p:sp>
+      <p:sp>
+        <p:nvSpPr>
+          <p:cNvPr id="4" name="TextBox 3"/>
           <p:cNvSpPr txBox="1"/>
           <p:nvPr/>
         </p:nvSpPr>
         <p:spPr>
           <a:xfrm>
-            <a:off x="594360" y="5687568"/>
-            <a:ext cx="10972800" cy="411480"/>
+            <a:off x="731520" y="3337560"/>
+            <a:ext cx="10515600" cy="822960"/>
           </a:xfrm>
           <a:prstGeom prst="rect">
             <a:avLst/>
@@ -13283,131 +12944,16 @@
           </a:bodyPr>
           <a:lstStyle/>
           <a:p>
-            <a:pPr>
-              <a:defRPr sz="1100" b="0">
-                <a:solidFill>
-                  <a:srgbClr val="37474F"/>
-                </a:solidFill>
-                <a:latin typeface="Calibri"/>
-              </a:defRPr>
-            </a:pPr>
-            <a:r>
-              <a:t>Clone repos → Docker up → validate → generate slides → teach modules A–I</a:t>
-            </a:r>
-          </a:p>
-        </p:txBody>
-      </p:sp>
-      <p:sp>
-        <p:nvSpPr>
-          <p:cNvPr id="7" name="Rectangle 6"/>
-          <p:cNvSpPr/>
-          <p:nvPr/>
-        </p:nvSpPr>
-        <p:spPr>
-          <a:xfrm>
-            <a:off x="457200" y="6446520"/>
-            <a:ext cx="11274552" cy="18288"/>
-          </a:xfrm>
-          <a:prstGeom prst="rect">
-            <a:avLst/>
-          </a:prstGeom>
-          <a:solidFill>
-            <a:srgbClr val="B2EBF2"/>
-          </a:solidFill>
-          <a:ln>
-            <a:noFill/>
-          </a:ln>
-        </p:spPr>
-        <p:style>
-          <a:lnRef idx="1">
-            <a:schemeClr val="accent1"/>
-          </a:lnRef>
-          <a:fillRef idx="3">
-            <a:schemeClr val="accent1"/>
-          </a:fillRef>
-          <a:effectRef idx="2">
-            <a:schemeClr val="accent1"/>
-          </a:effectRef>
-          <a:fontRef idx="minor">
-            <a:schemeClr val="lt1"/>
-          </a:fontRef>
-        </p:style>
-        <p:txBody>
-          <a:bodyPr rtlCol="0" anchor="ctr"/>
-          <a:lstStyle/>
-          <a:p>
-            <a:pPr algn="ctr"/>
-          </a:p>
-        </p:txBody>
-      </p:sp>
-      <p:sp>
-        <p:nvSpPr>
-          <p:cNvPr id="8" name="TextBox 7"/>
-          <p:cNvSpPr txBox="1"/>
-          <p:nvPr/>
-        </p:nvSpPr>
-        <p:spPr>
-          <a:xfrm>
-            <a:off x="502920" y="6473952"/>
-            <a:ext cx="7315200" cy="320040"/>
-          </a:xfrm>
-          <a:prstGeom prst="rect">
-            <a:avLst/>
-          </a:prstGeom>
-          <a:noFill/>
-        </p:spPr>
-        <p:txBody>
-          <a:bodyPr wrap="none">
-            <a:spAutoFit/>
-          </a:bodyPr>
-          <a:lstStyle/>
-          <a:p>
-            <a:pPr>
-              <a:defRPr sz="900" b="0">
-                <a:solidFill>
-                  <a:srgbClr val="90A4AE"/>
-                </a:solidFill>
-                <a:latin typeface="Calibri"/>
-              </a:defRPr>
-            </a:pPr>
-            <a:r>
-              <a:t>Assembling Smart CPS · Stack4Things Training</a:t>
-            </a:r>
-          </a:p>
-        </p:txBody>
-      </p:sp>
-      <p:sp>
-        <p:nvSpPr>
-          <p:cNvPr id="9" name="TextBox 8"/>
-          <p:cNvSpPr txBox="1"/>
-          <p:nvPr/>
-        </p:nvSpPr>
-        <p:spPr>
-          <a:xfrm>
-            <a:off x="9326880" y="6455664"/>
-            <a:ext cx="2377440" cy="320040"/>
-          </a:xfrm>
-          <a:prstGeom prst="rect">
-            <a:avLst/>
-          </a:prstGeom>
-          <a:noFill/>
-        </p:spPr>
-        <p:txBody>
-          <a:bodyPr wrap="none">
-            <a:spAutoFit/>
-          </a:bodyPr>
-          <a:lstStyle/>
-          <a:p>
-            <a:pPr algn="r">
-              <a:defRPr sz="900" b="1">
-                <a:solidFill>
-                  <a:srgbClr val="008B9A"/>
-                </a:solidFill>
-                <a:latin typeface="Calibri"/>
-              </a:defRPr>
-            </a:pPr>
-            <a:r>
-              <a:t>Diagram</a:t>
+            <a:pPr algn="ctr">
+              <a:defRPr sz="2200" b="0">
+                <a:solidFill>
+                  <a:srgbClr val="B2EBF2"/>
+                </a:solidFill>
+                <a:latin typeface="Calibri"/>
+              </a:defRPr>
+            </a:pPr>
+            <a:r>
+              <a:t>Part II hands-on chapters → training modules</a:t>
             </a:r>
           </a:p>
         </p:txBody>
@@ -13557,7 +13103,7 @@
           <a:lstStyle/>
           <a:p>
             <a:pPr algn="r">
-              <a:defRPr sz="1000" b="0">
+              <a:defRPr sz="1100" b="0">
                 <a:solidFill>
                   <a:srgbClr val="78909C"/>
                 </a:solidFill>
@@ -13565,7 +13111,7 @@
               </a:defRPr>
             </a:pPr>
             <a:r>
-              <a:t>diagrams/seq-*.png · generate_diagrams.py</a:t>
+              <a:t>Book Part I · Ch.1–12 · intro.tex</a:t>
             </a:r>
           </a:p>
         </p:txBody>
@@ -13593,7 +13139,7 @@
           <a:lstStyle/>
           <a:p>
             <a:pPr>
-              <a:defRPr sz="2400" b="1">
+              <a:defRPr sz="2600" b="1">
                 <a:solidFill>
                   <a:srgbClr val="0D2B45"/>
                 </a:solidFill>
@@ -13601,7 +13147,7 @@
               </a:defRPr>
             </a:pPr>
             <a:r>
-              <a:t>Per-module UML sequence diagrams</a:t>
+              <a:t>Part I background — when to read before labs</a:t>
             </a:r>
           </a:p>
         </p:txBody>
@@ -13615,7 +13161,7 @@
         <p:spPr>
           <a:xfrm>
             <a:off x="502920" y="1554480"/>
-            <a:ext cx="11155680" cy="2651759"/>
+            <a:ext cx="11155680" cy="4800600"/>
           </a:xfrm>
           <a:prstGeom prst="roundRect">
             <a:avLst/>
@@ -13660,7 +13206,7 @@
         <p:spPr>
           <a:xfrm>
             <a:off x="777240" y="1673352"/>
-            <a:ext cx="10424160" cy="2468879"/>
+            <a:ext cx="10424160" cy="4572000"/>
           </a:xfrm>
           <a:prstGeom prst="rect">
             <a:avLst/>
@@ -13680,7 +13226,7 @@
               <a:spcAft>
                 <a:spcPts val="500"/>
               </a:spcAft>
-              <a:defRPr sz="1500" b="0">
+              <a:defRPr sz="1600" b="0">
                 <a:solidFill>
                   <a:srgbClr val="37474F"/>
                 </a:solidFill>
@@ -13688,7 +13234,7 @@
               </a:defRPr>
             </a:pPr>
             <a:r>
-              <a:t>▸  Each module deck includes sequence diagrams for the primary hands-on workflow (not only architecture boxes).</a:t>
+              <a:t>▸  Ch.1–3: cloud continuum foundations — context for why S4T extends OpenStack to IoT.</a:t>
             </a:r>
           </a:p>
           <a:p>
@@ -13699,7 +13245,7 @@
               <a:spcAft>
                 <a:spcPts val="500"/>
               </a:spcAft>
-              <a:defRPr sz="1500" b="0">
+              <a:defRPr sz="1600" b="0">
                 <a:solidFill>
                   <a:srgbClr val="37474F"/>
                 </a:solidFill>
@@ -13707,7 +13253,7 @@
               </a:defRPr>
             </a:pPr>
             <a:r>
-              <a:t>▸  Module A: board onboarding — Horizon → Conductor → Crossbar → Lightning-Rod → Active.</a:t>
+              <a:t>▸  Ch.8: authentication and authorization — explains Keystone role in Horizon login.</a:t>
             </a:r>
           </a:p>
           <a:p>
@@ -13718,7 +13264,7 @@
               <a:spcAft>
                 <a:spcPts val="500"/>
               </a:spcAft>
-              <a:defRPr sz="1500" b="0">
+              <a:defRPr sz="1600" b="0">
                 <a:solidFill>
                   <a:srgbClr val="37474F"/>
                 </a:solidFill>
@@ -13726,7 +13272,7 @@
               </a:defRPr>
             </a:pPr>
             <a:r>
-              <a:t>▸  Module B: sync Plugin Call — inject → WAMP rpc → Worker.run() → result to Horizon.</a:t>
+              <a:t>▸  Ch.9: heterogeneous compute — motivates edge vs cloud placement decisions in plugins.</a:t>
             </a:r>
           </a:p>
           <a:p>
@@ -13737,7 +13283,7 @@
               <a:spcAft>
                 <a:spcPts val="500"/>
               </a:spcAft>
-              <a:defRPr sz="1500" b="0">
+              <a:defRPr sz="1600" b="0">
                 <a:solidFill>
                   <a:srgbClr val="37474F"/>
                 </a:solidFill>
@@ -13745,7 +13291,7 @@
               </a:defRPr>
             </a:pPr>
             <a:r>
-              <a:t>▸  Module C: async loop — Start plugin → CSV row → InfluxDB every 30s.</a:t>
+              <a:t>▸  Ch.10: SLICES research infrastructure — precursor to Ch.11 Blueprint module.</a:t>
             </a:r>
           </a:p>
           <a:p>
@@ -13756,7 +13302,7 @@
               <a:spcAft>
                 <a:spcPts val="500"/>
               </a:spcAft>
-              <a:defRPr sz="1500" b="0">
+              <a:defRPr sz="1600" b="0">
                 <a:solidFill>
                   <a:srgbClr val="37474F"/>
                 </a:solidFill>
@@ -13764,7 +13310,7 @@
               </a:defRPr>
             </a:pPr>
             <a:r>
-              <a:t>▸  Module D: fleet inject to three boards · Module F: ServiceEnable + WSTUN tunnel.</a:t>
+              <a:t>▸  Ch.12: summary chapter — useful recap after completing core Modules A–C.</a:t>
             </a:r>
           </a:p>
           <a:p>
@@ -13775,7 +13321,7 @@
               <a:spcAft>
                 <a:spcPts val="500"/>
               </a:spcAft>
-              <a:defRPr sz="1500" b="0">
+              <a:defRPr sz="1600" b="0">
                 <a:solidFill>
                   <a:srgbClr val="37474F"/>
                 </a:solidFill>
@@ -13783,7 +13329,7 @@
               </a:defRPr>
             </a:pPr>
             <a:r>
-              <a:t>▸  Module G: Flower FedAvg round across three edge clients.</a:t>
+              <a:t>▸  Part I is referenced throughout decks; deep read of Ch.4 before Module A is essential.</a:t>
             </a:r>
           </a:p>
         </p:txBody>
